--- a/assets/desempatador.pptx
+++ b/assets/desempatador.pptx
@@ -1,28 +1,28 @@
 
 <file path=ppt/presentation.xml><?xml version="1.0" encoding="utf-8"?>
-<p:presentation xmlns:a="http://schemas.openxmlformats.org/drawingml/2006/main" xmlns:r="http://schemas.openxmlformats.org/officeDocument/2006/relationships" xmlns:mc="http://schemas.openxmlformats.org/markup-compatibility/2006" xmlns:mv="urn:schemas-microsoft-com:mac:vml" xmlns:p="http://schemas.openxmlformats.org/presentationml/2006/main" xmlns:c="http://schemas.openxmlformats.org/drawingml/2006/chart" xmlns:dgm="http://schemas.openxmlformats.org/drawingml/2006/diagram" xmlns:o="urn:schemas-microsoft-com:office:office" xmlns:v="urn:schemas-microsoft-com:vml" xmlns:pvml="urn:schemas-microsoft-com:office:powerpoint" xmlns:com="http://schemas.openxmlformats.org/drawingml/2006/compatibility" xmlns:p14="http://schemas.microsoft.com/office/powerpoint/2010/main" xmlns:p15="http://schemas.microsoft.com/office/powerpoint/2012/main" xmlns:ahyp="http://schemas.microsoft.com/office/drawing/2018/hyperlinkcolor" autoCompressPictures="0" embedTrueTypeFonts="1" strictFirstAndLastChars="0" saveSubsetFonts="1">
+<p:presentation xmlns:a="http://schemas.openxmlformats.org/drawingml/2006/main" xmlns:r="http://schemas.openxmlformats.org/officeDocument/2006/relationships" xmlns:p="http://schemas.openxmlformats.org/presentationml/2006/main" strictFirstAndLastChars="0" embedTrueTypeFonts="1" saveSubsetFonts="1" autoCompressPictures="0">
   <p:sldMasterIdLst>
-    <p:sldMasterId id="2147483659" r:id="rId4"/>
+    <p:sldMasterId id="2147483659" r:id="rId1"/>
   </p:sldMasterIdLst>
   <p:notesMasterIdLst>
-    <p:notesMasterId r:id="rId5"/>
+    <p:notesMasterId r:id="rId3"/>
   </p:notesMasterIdLst>
   <p:sldIdLst>
-    <p:sldId id="256" r:id="rId6"/>
+    <p:sldId id="256" r:id="rId2"/>
   </p:sldIdLst>
-  <p:sldSz cy="18288000" cx="10287000"/>
+  <p:sldSz cx="10287000" cy="18288000"/>
   <p:notesSz cx="6858000" cy="9144000"/>
   <p:embeddedFontLst>
     <p:embeddedFont>
-      <p:font typeface="Archivo"/>
-      <p:regular r:id="rId7"/>
-      <p:bold r:id="rId8"/>
-      <p:italic r:id="rId9"/>
-      <p:boldItalic r:id="rId10"/>
+      <p:font typeface="Archivo" panose="020B0604020202020204" charset="0"/>
+      <p:regular r:id="rId4"/>
+      <p:bold r:id="rId5"/>
+      <p:italic r:id="rId6"/>
+      <p:boldItalic r:id="rId7"/>
     </p:embeddedFont>
   </p:embeddedFontLst>
   <p:defaultTextStyle>
-    <a:defPPr lvl="0" marR="0" rtl="0" algn="l">
+    <a:defPPr marR="0" lvl="0" algn="l" rtl="0">
       <a:lnSpc>
         <a:spcPct val="100000"/>
       </a:lnSpc>
@@ -33,7 +33,7 @@
         <a:spcPts val="0"/>
       </a:spcAft>
     </a:defPPr>
-    <a:lvl1pPr lvl="0" marR="0" rtl="0" algn="l">
+    <a:lvl1pPr marR="0" lvl="0" algn="l" rtl="0">
       <a:lnSpc>
         <a:spcPct val="100000"/>
       </a:lnSpc>
@@ -47,7 +47,7 @@
         <a:srgbClr val="000000"/>
       </a:buClr>
       <a:buFont typeface="Arial"/>
-      <a:defRPr b="0" i="0" sz="1400" u="none" cap="none" strike="noStrike">
+      <a:defRPr sz="1400" b="0" i="0" u="none" strike="noStrike" cap="none">
         <a:solidFill>
           <a:srgbClr val="000000"/>
         </a:solidFill>
@@ -57,7 +57,7 @@
         <a:sym typeface="Arial"/>
       </a:defRPr>
     </a:lvl1pPr>
-    <a:lvl2pPr lvl="1" marR="0" rtl="0" algn="l">
+    <a:lvl2pPr marR="0" lvl="1" algn="l" rtl="0">
       <a:lnSpc>
         <a:spcPct val="100000"/>
       </a:lnSpc>
@@ -71,7 +71,7 @@
         <a:srgbClr val="000000"/>
       </a:buClr>
       <a:buFont typeface="Arial"/>
-      <a:defRPr b="0" i="0" sz="1400" u="none" cap="none" strike="noStrike">
+      <a:defRPr sz="1400" b="0" i="0" u="none" strike="noStrike" cap="none">
         <a:solidFill>
           <a:srgbClr val="000000"/>
         </a:solidFill>
@@ -81,7 +81,7 @@
         <a:sym typeface="Arial"/>
       </a:defRPr>
     </a:lvl2pPr>
-    <a:lvl3pPr lvl="2" marR="0" rtl="0" algn="l">
+    <a:lvl3pPr marR="0" lvl="2" algn="l" rtl="0">
       <a:lnSpc>
         <a:spcPct val="100000"/>
       </a:lnSpc>
@@ -95,7 +95,7 @@
         <a:srgbClr val="000000"/>
       </a:buClr>
       <a:buFont typeface="Arial"/>
-      <a:defRPr b="0" i="0" sz="1400" u="none" cap="none" strike="noStrike">
+      <a:defRPr sz="1400" b="0" i="0" u="none" strike="noStrike" cap="none">
         <a:solidFill>
           <a:srgbClr val="000000"/>
         </a:solidFill>
@@ -105,7 +105,7 @@
         <a:sym typeface="Arial"/>
       </a:defRPr>
     </a:lvl3pPr>
-    <a:lvl4pPr lvl="3" marR="0" rtl="0" algn="l">
+    <a:lvl4pPr marR="0" lvl="3" algn="l" rtl="0">
       <a:lnSpc>
         <a:spcPct val="100000"/>
       </a:lnSpc>
@@ -119,7 +119,7 @@
         <a:srgbClr val="000000"/>
       </a:buClr>
       <a:buFont typeface="Arial"/>
-      <a:defRPr b="0" i="0" sz="1400" u="none" cap="none" strike="noStrike">
+      <a:defRPr sz="1400" b="0" i="0" u="none" strike="noStrike" cap="none">
         <a:solidFill>
           <a:srgbClr val="000000"/>
         </a:solidFill>
@@ -129,7 +129,7 @@
         <a:sym typeface="Arial"/>
       </a:defRPr>
     </a:lvl4pPr>
-    <a:lvl5pPr lvl="4" marR="0" rtl="0" algn="l">
+    <a:lvl5pPr marR="0" lvl="4" algn="l" rtl="0">
       <a:lnSpc>
         <a:spcPct val="100000"/>
       </a:lnSpc>
@@ -143,7 +143,7 @@
         <a:srgbClr val="000000"/>
       </a:buClr>
       <a:buFont typeface="Arial"/>
-      <a:defRPr b="0" i="0" sz="1400" u="none" cap="none" strike="noStrike">
+      <a:defRPr sz="1400" b="0" i="0" u="none" strike="noStrike" cap="none">
         <a:solidFill>
           <a:srgbClr val="000000"/>
         </a:solidFill>
@@ -153,7 +153,7 @@
         <a:sym typeface="Arial"/>
       </a:defRPr>
     </a:lvl5pPr>
-    <a:lvl6pPr lvl="5" marR="0" rtl="0" algn="l">
+    <a:lvl6pPr marR="0" lvl="5" algn="l" rtl="0">
       <a:lnSpc>
         <a:spcPct val="100000"/>
       </a:lnSpc>
@@ -167,7 +167,7 @@
         <a:srgbClr val="000000"/>
       </a:buClr>
       <a:buFont typeface="Arial"/>
-      <a:defRPr b="0" i="0" sz="1400" u="none" cap="none" strike="noStrike">
+      <a:defRPr sz="1400" b="0" i="0" u="none" strike="noStrike" cap="none">
         <a:solidFill>
           <a:srgbClr val="000000"/>
         </a:solidFill>
@@ -177,7 +177,7 @@
         <a:sym typeface="Arial"/>
       </a:defRPr>
     </a:lvl6pPr>
-    <a:lvl7pPr lvl="6" marR="0" rtl="0" algn="l">
+    <a:lvl7pPr marR="0" lvl="6" algn="l" rtl="0">
       <a:lnSpc>
         <a:spcPct val="100000"/>
       </a:lnSpc>
@@ -191,7 +191,7 @@
         <a:srgbClr val="000000"/>
       </a:buClr>
       <a:buFont typeface="Arial"/>
-      <a:defRPr b="0" i="0" sz="1400" u="none" cap="none" strike="noStrike">
+      <a:defRPr sz="1400" b="0" i="0" u="none" strike="noStrike" cap="none">
         <a:solidFill>
           <a:srgbClr val="000000"/>
         </a:solidFill>
@@ -201,7 +201,7 @@
         <a:sym typeface="Arial"/>
       </a:defRPr>
     </a:lvl7pPr>
-    <a:lvl8pPr lvl="7" marR="0" rtl="0" algn="l">
+    <a:lvl8pPr marR="0" lvl="7" algn="l" rtl="0">
       <a:lnSpc>
         <a:spcPct val="100000"/>
       </a:lnSpc>
@@ -215,7 +215,7 @@
         <a:srgbClr val="000000"/>
       </a:buClr>
       <a:buFont typeface="Arial"/>
-      <a:defRPr b="0" i="0" sz="1400" u="none" cap="none" strike="noStrike">
+      <a:defRPr sz="1400" b="0" i="0" u="none" strike="noStrike" cap="none">
         <a:solidFill>
           <a:srgbClr val="000000"/>
         </a:solidFill>
@@ -225,7 +225,7 @@
         <a:sym typeface="Arial"/>
       </a:defRPr>
     </a:lvl8pPr>
-    <a:lvl9pPr lvl="8" marR="0" rtl="0" algn="l">
+    <a:lvl9pPr marR="0" lvl="8" algn="l" rtl="0">
       <a:lnSpc>
         <a:spcPct val="100000"/>
       </a:lnSpc>
@@ -239,7 +239,7 @@
         <a:srgbClr val="000000"/>
       </a:buClr>
       <a:buFont typeface="Arial"/>
-      <a:defRPr b="0" i="0" sz="1400" u="none" cap="none" strike="noStrike">
+      <a:defRPr sz="1400" b="0" i="0" u="none" strike="noStrike" cap="none">
         <a:solidFill>
           <a:srgbClr val="000000"/>
         </a:solidFill>
@@ -252,7 +252,7 @@
   </p:defaultTextStyle>
   <p:extLst>
     <p:ext uri="{EFAFB233-063F-42B5-8137-9DF3F51BA10A}">
-      <p15:sldGuideLst>
+      <p15:sldGuideLst xmlns:p15="http://schemas.microsoft.com/office/powerpoint/2012/main">
         <p15:guide id="1" orient="horz" pos="5760">
           <p15:clr>
             <a:srgbClr val="747775"/>
@@ -270,11 +270,16 @@
 </file>
 
 <file path=ppt/notesMasters/notesMaster1.xml><?xml version="1.0" encoding="utf-8"?>
-<p:notesMaster xmlns:a="http://schemas.openxmlformats.org/drawingml/2006/main" xmlns:r="http://schemas.openxmlformats.org/officeDocument/2006/relationships" xmlns:mc="http://schemas.openxmlformats.org/markup-compatibility/2006" xmlns:mv="urn:schemas-microsoft-com:mac:vml" xmlns:p="http://schemas.openxmlformats.org/presentationml/2006/main" xmlns:c="http://schemas.openxmlformats.org/drawingml/2006/chart" xmlns:dgm="http://schemas.openxmlformats.org/drawingml/2006/diagram" xmlns:o="urn:schemas-microsoft-com:office:office" xmlns:v="urn:schemas-microsoft-com:vml" xmlns:pvml="urn:schemas-microsoft-com:office:powerpoint" xmlns:com="http://schemas.openxmlformats.org/drawingml/2006/compatibility" xmlns:p14="http://schemas.microsoft.com/office/powerpoint/2010/main" xmlns:p15="http://schemas.microsoft.com/office/powerpoint/2012/main" xmlns:ahyp="http://schemas.microsoft.com/office/drawing/2018/hyperlinkcolor">
+<p:notesMaster xmlns:a="http://schemas.openxmlformats.org/drawingml/2006/main" xmlns:r="http://schemas.openxmlformats.org/officeDocument/2006/relationships" xmlns:p="http://schemas.openxmlformats.org/presentationml/2006/main">
   <p:cSld>
+    <p:bg>
+      <p:bgRef idx="1001">
+        <a:schemeClr val="bg1"/>
+      </p:bgRef>
+    </p:bg>
     <p:spTree>
       <p:nvGrpSpPr>
-        <p:cNvPr id="2" name="Shape 2"/>
+        <p:cNvPr id="1" name="Shape 2"/>
         <p:cNvGrpSpPr/>
         <p:nvPr/>
       </p:nvGrpSpPr>
@@ -289,9 +294,11 @@
       <p:sp>
         <p:nvSpPr>
           <p:cNvPr id="3" name="Google Shape;3;n"/>
-          <p:cNvSpPr/>
+          <p:cNvSpPr>
+            <a:spLocks noGrp="1" noRot="1" noChangeAspect="1"/>
+          </p:cNvSpPr>
           <p:nvPr>
-            <p:ph idx="2" type="sldImg"/>
+            <p:ph type="sldImg" idx="2"/>
           </p:nvPr>
         </p:nvSpPr>
         <p:spPr>
@@ -300,9 +307,13 @@
             <a:ext cx="1928700" cy="3429000"/>
           </a:xfrm>
           <a:custGeom>
-            <a:rect b="b" l="l" r="r" t="t"/>
+            <a:avLst/>
+            <a:gdLst/>
+            <a:ahLst/>
+            <a:cxnLst/>
+            <a:rect l="l" t="t" r="r" b="b"/>
             <a:pathLst>
-              <a:path extrusionOk="0" h="120000" w="120000">
+              <a:path w="120000" h="120000" extrusionOk="0">
                 <a:moveTo>
                   <a:pt x="0" y="0"/>
                 </a:moveTo>
@@ -320,23 +331,25 @@
             </a:pathLst>
           </a:custGeom>
           <a:noFill/>
-          <a:ln cap="flat" cmpd="sng" w="9525">
+          <a:ln w="9525" cap="flat" cmpd="sng">
             <a:solidFill>
               <a:srgbClr val="000000"/>
             </a:solidFill>
             <a:prstDash val="solid"/>
             <a:round/>
-            <a:headEnd len="sm" w="sm" type="none"/>
-            <a:tailEnd len="sm" w="sm" type="none"/>
+            <a:headEnd type="none" w="sm" len="sm"/>
+            <a:tailEnd type="none" w="sm" len="sm"/>
           </a:ln>
         </p:spPr>
       </p:sp>
       <p:sp>
         <p:nvSpPr>
           <p:cNvPr id="4" name="Google Shape;4;n"/>
-          <p:cNvSpPr txBox="1"/>
+          <p:cNvSpPr txBox="1">
+            <a:spLocks noGrp="1"/>
+          </p:cNvSpPr>
           <p:nvPr>
-            <p:ph idx="1" type="body"/>
+            <p:ph type="body" idx="1"/>
           </p:nvPr>
         </p:nvSpPr>
         <p:spPr>
@@ -353,11 +366,11 @@
           </a:ln>
         </p:spPr>
         <p:txBody>
-          <a:bodyPr anchorCtr="0" anchor="t" bIns="91425" lIns="91425" spcFirstLastPara="1" rIns="91425" wrap="square" tIns="91425">
+          <a:bodyPr spcFirstLastPara="1" wrap="square" lIns="91425" tIns="91425" rIns="91425" bIns="91425" anchor="t" anchorCtr="0">
             <a:noAutofit/>
           </a:bodyPr>
           <a:lstStyle>
-            <a:lvl1pPr indent="-298450" lvl="0" marL="457200">
+            <a:lvl1pPr marL="457200" lvl="0" indent="-298450">
               <a:spcBef>
                 <a:spcPts val="0"/>
               </a:spcBef>
@@ -368,7 +381,7 @@
               <a:buChar char="●"/>
               <a:defRPr sz="1100"/>
             </a:lvl1pPr>
-            <a:lvl2pPr indent="-298450" lvl="1" marL="914400">
+            <a:lvl2pPr marL="914400" lvl="1" indent="-298450">
               <a:spcBef>
                 <a:spcPts val="0"/>
               </a:spcBef>
@@ -379,7 +392,7 @@
               <a:buChar char="○"/>
               <a:defRPr sz="1100"/>
             </a:lvl2pPr>
-            <a:lvl3pPr indent="-298450" lvl="2" marL="1371600">
+            <a:lvl3pPr marL="1371600" lvl="2" indent="-298450">
               <a:spcBef>
                 <a:spcPts val="0"/>
               </a:spcBef>
@@ -390,7 +403,7 @@
               <a:buChar char="■"/>
               <a:defRPr sz="1100"/>
             </a:lvl3pPr>
-            <a:lvl4pPr indent="-298450" lvl="3" marL="1828800">
+            <a:lvl4pPr marL="1828800" lvl="3" indent="-298450">
               <a:spcBef>
                 <a:spcPts val="0"/>
               </a:spcBef>
@@ -401,7 +414,7 @@
               <a:buChar char="●"/>
               <a:defRPr sz="1100"/>
             </a:lvl4pPr>
-            <a:lvl5pPr indent="-298450" lvl="4" marL="2286000">
+            <a:lvl5pPr marL="2286000" lvl="4" indent="-298450">
               <a:spcBef>
                 <a:spcPts val="0"/>
               </a:spcBef>
@@ -412,7 +425,7 @@
               <a:buChar char="○"/>
               <a:defRPr sz="1100"/>
             </a:lvl5pPr>
-            <a:lvl6pPr indent="-298450" lvl="5" marL="2743200">
+            <a:lvl6pPr marL="2743200" lvl="5" indent="-298450">
               <a:spcBef>
                 <a:spcPts val="0"/>
               </a:spcBef>
@@ -423,7 +436,7 @@
               <a:buChar char="■"/>
               <a:defRPr sz="1100"/>
             </a:lvl6pPr>
-            <a:lvl7pPr indent="-298450" lvl="6" marL="3200400">
+            <a:lvl7pPr marL="3200400" lvl="6" indent="-298450">
               <a:spcBef>
                 <a:spcPts val="0"/>
               </a:spcBef>
@@ -434,7 +447,7 @@
               <a:buChar char="●"/>
               <a:defRPr sz="1100"/>
             </a:lvl7pPr>
-            <a:lvl8pPr indent="-298450" lvl="7" marL="3657600">
+            <a:lvl8pPr marL="3657600" lvl="7" indent="-298450">
               <a:spcBef>
                 <a:spcPts val="0"/>
               </a:spcBef>
@@ -445,7 +458,7 @@
               <a:buChar char="○"/>
               <a:defRPr sz="1100"/>
             </a:lvl8pPr>
-            <a:lvl9pPr indent="-298450" lvl="8" marL="4114800">
+            <a:lvl9pPr marL="4114800" lvl="8" indent="-298450">
               <a:spcBef>
                 <a:spcPts val="0"/>
               </a:spcBef>
@@ -457,14 +470,16 @@
               <a:defRPr sz="1100"/>
             </a:lvl9pPr>
           </a:lstStyle>
-          <a:p/>
+          <a:p>
+            <a:endParaRPr/>
+          </a:p>
         </p:txBody>
       </p:sp>
     </p:spTree>
   </p:cSld>
-  <p:clrMap accent1="accent1" accent2="accent2" accent3="accent3" accent4="accent4" accent5="accent5" accent6="accent6" bg1="lt1" bg2="dk2" tx1="dk1" tx2="lt2" folHlink="folHlink" hlink="hlink"/>
+  <p:clrMap bg1="lt1" tx1="dk1" bg2="dk2" tx2="lt2" accent1="accent1" accent2="accent2" accent3="accent3" accent4="accent4" accent5="accent5" accent6="accent6" hlink="hlink" folHlink="folHlink"/>
   <p:notesStyle>
-    <a:defPPr lvl="0" marR="0" rtl="0" algn="l">
+    <a:defPPr marR="0" lvl="0" algn="l" rtl="0">
       <a:lnSpc>
         <a:spcPct val="100000"/>
       </a:lnSpc>
@@ -475,7 +490,7 @@
         <a:spcPts val="0"/>
       </a:spcAft>
     </a:defPPr>
-    <a:lvl1pPr lvl="0" marR="0" rtl="0" algn="l">
+    <a:lvl1pPr marR="0" lvl="0" algn="l" rtl="0">
       <a:lnSpc>
         <a:spcPct val="100000"/>
       </a:lnSpc>
@@ -489,7 +504,7 @@
         <a:srgbClr val="000000"/>
       </a:buClr>
       <a:buFont typeface="Arial"/>
-      <a:defRPr b="0" i="0" sz="1400" u="none" cap="none" strike="noStrike">
+      <a:defRPr sz="1400" b="0" i="0" u="none" strike="noStrike" cap="none">
         <a:solidFill>
           <a:srgbClr val="000000"/>
         </a:solidFill>
@@ -499,7 +514,7 @@
         <a:sym typeface="Arial"/>
       </a:defRPr>
     </a:lvl1pPr>
-    <a:lvl2pPr lvl="1" marR="0" rtl="0" algn="l">
+    <a:lvl2pPr marR="0" lvl="1" algn="l" rtl="0">
       <a:lnSpc>
         <a:spcPct val="100000"/>
       </a:lnSpc>
@@ -513,7 +528,7 @@
         <a:srgbClr val="000000"/>
       </a:buClr>
       <a:buFont typeface="Arial"/>
-      <a:defRPr b="0" i="0" sz="1400" u="none" cap="none" strike="noStrike">
+      <a:defRPr sz="1400" b="0" i="0" u="none" strike="noStrike" cap="none">
         <a:solidFill>
           <a:srgbClr val="000000"/>
         </a:solidFill>
@@ -523,7 +538,7 @@
         <a:sym typeface="Arial"/>
       </a:defRPr>
     </a:lvl2pPr>
-    <a:lvl3pPr lvl="2" marR="0" rtl="0" algn="l">
+    <a:lvl3pPr marR="0" lvl="2" algn="l" rtl="0">
       <a:lnSpc>
         <a:spcPct val="100000"/>
       </a:lnSpc>
@@ -537,7 +552,7 @@
         <a:srgbClr val="000000"/>
       </a:buClr>
       <a:buFont typeface="Arial"/>
-      <a:defRPr b="0" i="0" sz="1400" u="none" cap="none" strike="noStrike">
+      <a:defRPr sz="1400" b="0" i="0" u="none" strike="noStrike" cap="none">
         <a:solidFill>
           <a:srgbClr val="000000"/>
         </a:solidFill>
@@ -547,7 +562,7 @@
         <a:sym typeface="Arial"/>
       </a:defRPr>
     </a:lvl3pPr>
-    <a:lvl4pPr lvl="3" marR="0" rtl="0" algn="l">
+    <a:lvl4pPr marR="0" lvl="3" algn="l" rtl="0">
       <a:lnSpc>
         <a:spcPct val="100000"/>
       </a:lnSpc>
@@ -561,7 +576,7 @@
         <a:srgbClr val="000000"/>
       </a:buClr>
       <a:buFont typeface="Arial"/>
-      <a:defRPr b="0" i="0" sz="1400" u="none" cap="none" strike="noStrike">
+      <a:defRPr sz="1400" b="0" i="0" u="none" strike="noStrike" cap="none">
         <a:solidFill>
           <a:srgbClr val="000000"/>
         </a:solidFill>
@@ -571,7 +586,7 @@
         <a:sym typeface="Arial"/>
       </a:defRPr>
     </a:lvl4pPr>
-    <a:lvl5pPr lvl="4" marR="0" rtl="0" algn="l">
+    <a:lvl5pPr marR="0" lvl="4" algn="l" rtl="0">
       <a:lnSpc>
         <a:spcPct val="100000"/>
       </a:lnSpc>
@@ -585,7 +600,7 @@
         <a:srgbClr val="000000"/>
       </a:buClr>
       <a:buFont typeface="Arial"/>
-      <a:defRPr b="0" i="0" sz="1400" u="none" cap="none" strike="noStrike">
+      <a:defRPr sz="1400" b="0" i="0" u="none" strike="noStrike" cap="none">
         <a:solidFill>
           <a:srgbClr val="000000"/>
         </a:solidFill>
@@ -595,7 +610,7 @@
         <a:sym typeface="Arial"/>
       </a:defRPr>
     </a:lvl5pPr>
-    <a:lvl6pPr lvl="5" marR="0" rtl="0" algn="l">
+    <a:lvl6pPr marR="0" lvl="5" algn="l" rtl="0">
       <a:lnSpc>
         <a:spcPct val="100000"/>
       </a:lnSpc>
@@ -609,7 +624,7 @@
         <a:srgbClr val="000000"/>
       </a:buClr>
       <a:buFont typeface="Arial"/>
-      <a:defRPr b="0" i="0" sz="1400" u="none" cap="none" strike="noStrike">
+      <a:defRPr sz="1400" b="0" i="0" u="none" strike="noStrike" cap="none">
         <a:solidFill>
           <a:srgbClr val="000000"/>
         </a:solidFill>
@@ -619,7 +634,7 @@
         <a:sym typeface="Arial"/>
       </a:defRPr>
     </a:lvl6pPr>
-    <a:lvl7pPr lvl="6" marR="0" rtl="0" algn="l">
+    <a:lvl7pPr marR="0" lvl="6" algn="l" rtl="0">
       <a:lnSpc>
         <a:spcPct val="100000"/>
       </a:lnSpc>
@@ -633,7 +648,7 @@
         <a:srgbClr val="000000"/>
       </a:buClr>
       <a:buFont typeface="Arial"/>
-      <a:defRPr b="0" i="0" sz="1400" u="none" cap="none" strike="noStrike">
+      <a:defRPr sz="1400" b="0" i="0" u="none" strike="noStrike" cap="none">
         <a:solidFill>
           <a:srgbClr val="000000"/>
         </a:solidFill>
@@ -643,7 +658,7 @@
         <a:sym typeface="Arial"/>
       </a:defRPr>
     </a:lvl7pPr>
-    <a:lvl8pPr lvl="7" marR="0" rtl="0" algn="l">
+    <a:lvl8pPr marR="0" lvl="7" algn="l" rtl="0">
       <a:lnSpc>
         <a:spcPct val="100000"/>
       </a:lnSpc>
@@ -657,7 +672,7 @@
         <a:srgbClr val="000000"/>
       </a:buClr>
       <a:buFont typeface="Arial"/>
-      <a:defRPr b="0" i="0" sz="1400" u="none" cap="none" strike="noStrike">
+      <a:defRPr sz="1400" b="0" i="0" u="none" strike="noStrike" cap="none">
         <a:solidFill>
           <a:srgbClr val="000000"/>
         </a:solidFill>
@@ -667,7 +682,7 @@
         <a:sym typeface="Arial"/>
       </a:defRPr>
     </a:lvl8pPr>
-    <a:lvl9pPr lvl="8" marR="0" rtl="0" algn="l">
+    <a:lvl9pPr marR="0" lvl="8" algn="l" rtl="0">
       <a:lnSpc>
         <a:spcPct val="100000"/>
       </a:lnSpc>
@@ -681,7 +696,7 @@
         <a:srgbClr val="000000"/>
       </a:buClr>
       <a:buFont typeface="Arial"/>
-      <a:defRPr b="0" i="0" sz="1400" u="none" cap="none" strike="noStrike">
+      <a:defRPr sz="1400" b="0" i="0" u="none" strike="noStrike" cap="none">
         <a:solidFill>
           <a:srgbClr val="000000"/>
         </a:solidFill>
@@ -696,11 +711,11 @@
 </file>
 
 <file path=ppt/notesSlides/notesSlide1.xml><?xml version="1.0" encoding="utf-8"?>
-<p:notes xmlns:a="http://schemas.openxmlformats.org/drawingml/2006/main" xmlns:r="http://schemas.openxmlformats.org/officeDocument/2006/relationships" xmlns:mc="http://schemas.openxmlformats.org/markup-compatibility/2006" xmlns:mv="urn:schemas-microsoft-com:mac:vml" xmlns:p="http://schemas.openxmlformats.org/presentationml/2006/main" xmlns:c="http://schemas.openxmlformats.org/drawingml/2006/chart" xmlns:dgm="http://schemas.openxmlformats.org/drawingml/2006/diagram" xmlns:o="urn:schemas-microsoft-com:office:office" xmlns:v="urn:schemas-microsoft-com:vml" xmlns:pvml="urn:schemas-microsoft-com:office:powerpoint" xmlns:com="http://schemas.openxmlformats.org/drawingml/2006/compatibility" xmlns:p14="http://schemas.microsoft.com/office/powerpoint/2010/main" xmlns:p15="http://schemas.microsoft.com/office/powerpoint/2012/main" xmlns:ahyp="http://schemas.microsoft.com/office/drawing/2018/hyperlinkcolor" showMasterPhAnim="0" showMasterSp="0">
+<p:notes xmlns:a="http://schemas.openxmlformats.org/drawingml/2006/main" xmlns:r="http://schemas.openxmlformats.org/officeDocument/2006/relationships" xmlns:p="http://schemas.openxmlformats.org/presentationml/2006/main" showMasterSp="0" showMasterPhAnim="0">
   <p:cSld>
     <p:spTree>
       <p:nvGrpSpPr>
-        <p:cNvPr id="50" name="Shape 50"/>
+        <p:cNvPr id="1" name="Shape 50"/>
         <p:cNvGrpSpPr/>
         <p:nvPr/>
       </p:nvGrpSpPr>
@@ -715,20 +730,26 @@
       <p:sp>
         <p:nvSpPr>
           <p:cNvPr id="51" name="Google Shape;51;p:notes"/>
-          <p:cNvSpPr/>
+          <p:cNvSpPr>
+            <a:spLocks noGrp="1" noRot="1" noChangeAspect="1"/>
+          </p:cNvSpPr>
           <p:nvPr>
-            <p:ph idx="2" type="sldImg"/>
+            <p:ph type="sldImg" idx="2"/>
           </p:nvPr>
         </p:nvSpPr>
         <p:spPr>
           <a:xfrm>
-            <a:off x="2464919" y="685800"/>
-            <a:ext cx="1928700" cy="3429000"/>
+            <a:off x="2465388" y="685800"/>
+            <a:ext cx="1928812" cy="3429000"/>
           </a:xfrm>
           <a:custGeom>
-            <a:rect b="b" l="l" r="r" t="t"/>
+            <a:avLst/>
+            <a:gdLst/>
+            <a:ahLst/>
+            <a:cxnLst/>
+            <a:rect l="l" t="t" r="r" b="b"/>
             <a:pathLst>
-              <a:path extrusionOk="0" h="120000" w="120000">
+              <a:path w="120000" h="120000" extrusionOk="0">
                 <a:moveTo>
                   <a:pt x="0" y="0"/>
                 </a:moveTo>
@@ -750,9 +771,11 @@
       <p:sp>
         <p:nvSpPr>
           <p:cNvPr id="52" name="Google Shape;52;p:notes"/>
-          <p:cNvSpPr txBox="1"/>
+          <p:cNvSpPr txBox="1">
+            <a:spLocks noGrp="1"/>
+          </p:cNvSpPr>
           <p:nvPr>
-            <p:ph idx="1" type="body"/>
+            <p:ph type="body" idx="1"/>
           </p:nvPr>
         </p:nvSpPr>
         <p:spPr>
@@ -765,12 +788,12 @@
           </a:prstGeom>
         </p:spPr>
         <p:txBody>
-          <a:bodyPr anchorCtr="0" anchor="t" bIns="91425" lIns="91425" spcFirstLastPara="1" rIns="91425" wrap="square" tIns="91425">
+          <a:bodyPr spcFirstLastPara="1" wrap="square" lIns="91425" tIns="91425" rIns="91425" bIns="91425" anchor="t" anchorCtr="0">
             <a:noAutofit/>
           </a:bodyPr>
           <a:lstStyle/>
           <a:p>
-            <a:pPr indent="0" lvl="0" marL="0" rtl="0" algn="l">
+            <a:pPr marL="0" lvl="0" indent="0" algn="l" rtl="0">
               <a:spcBef>
                 <a:spcPts val="0"/>
               </a:spcBef>
@@ -779,9 +802,6 @@
               </a:spcAft>
               <a:buNone/>
             </a:pPr>
-            <a:r>
-              <a:t/>
-            </a:r>
             <a:endParaRPr/>
           </a:p>
         </p:txBody>
@@ -795,11 +815,11 @@
 </file>
 
 <file path=ppt/slideLayouts/slideLayout1.xml><?xml version="1.0" encoding="utf-8"?>
-<p:sldLayout xmlns:a="http://schemas.openxmlformats.org/drawingml/2006/main" xmlns:r="http://schemas.openxmlformats.org/officeDocument/2006/relationships" xmlns:mc="http://schemas.openxmlformats.org/markup-compatibility/2006" xmlns:mv="urn:schemas-microsoft-com:mac:vml" xmlns:p="http://schemas.openxmlformats.org/presentationml/2006/main" xmlns:c="http://schemas.openxmlformats.org/drawingml/2006/chart" xmlns:dgm="http://schemas.openxmlformats.org/drawingml/2006/diagram" xmlns:o="urn:schemas-microsoft-com:office:office" xmlns:v="urn:schemas-microsoft-com:vml" xmlns:pvml="urn:schemas-microsoft-com:office:powerpoint" xmlns:com="http://schemas.openxmlformats.org/drawingml/2006/compatibility" xmlns:p14="http://schemas.microsoft.com/office/powerpoint/2010/main" xmlns:p15="http://schemas.microsoft.com/office/powerpoint/2012/main" xmlns:ahyp="http://schemas.microsoft.com/office/drawing/2018/hyperlinkcolor" matchingName="Title slide" type="title">
+<p:sldLayout xmlns:a="http://schemas.openxmlformats.org/drawingml/2006/main" xmlns:r="http://schemas.openxmlformats.org/officeDocument/2006/relationships" xmlns:p="http://schemas.openxmlformats.org/presentationml/2006/main" matchingName="Title slide" type="title">
   <p:cSld name="TITLE">
     <p:spTree>
       <p:nvGrpSpPr>
-        <p:cNvPr id="9" name="Shape 9"/>
+        <p:cNvPr id="1" name="Shape 9"/>
         <p:cNvGrpSpPr/>
         <p:nvPr/>
       </p:nvGrpSpPr>
@@ -814,7 +834,9 @@
       <p:sp>
         <p:nvSpPr>
           <p:cNvPr id="10" name="Google Shape;10;p2"/>
-          <p:cNvSpPr txBox="1"/>
+          <p:cNvSpPr txBox="1">
+            <a:spLocks noGrp="1"/>
+          </p:cNvSpPr>
           <p:nvPr>
             <p:ph type="ctrTitle"/>
           </p:nvPr>
@@ -829,7 +851,7 @@
           </a:prstGeom>
         </p:spPr>
         <p:txBody>
-          <a:bodyPr anchorCtr="0" anchor="b" bIns="176925" lIns="176925" spcFirstLastPara="1" rIns="176925" wrap="square" tIns="176925">
+          <a:bodyPr spcFirstLastPara="1" wrap="square" lIns="176925" tIns="176925" rIns="176925" bIns="176925" anchor="b" anchorCtr="0">
             <a:normAutofit/>
           </a:bodyPr>
           <a:lstStyle>
@@ -933,15 +955,19 @@
               <a:defRPr sz="10100"/>
             </a:lvl9pPr>
           </a:lstStyle>
-          <a:p/>
+          <a:p>
+            <a:endParaRPr/>
+          </a:p>
         </p:txBody>
       </p:sp>
       <p:sp>
         <p:nvSpPr>
           <p:cNvPr id="11" name="Google Shape;11;p2"/>
-          <p:cNvSpPr txBox="1"/>
+          <p:cNvSpPr txBox="1">
+            <a:spLocks noGrp="1"/>
+          </p:cNvSpPr>
           <p:nvPr>
-            <p:ph idx="1" type="subTitle"/>
+            <p:ph type="subTitle" idx="1"/>
           </p:nvPr>
         </p:nvSpPr>
         <p:spPr>
@@ -954,7 +980,7 @@
           </a:prstGeom>
         </p:spPr>
         <p:txBody>
-          <a:bodyPr anchorCtr="0" anchor="t" bIns="176925" lIns="176925" spcFirstLastPara="1" rIns="176925" wrap="square" tIns="176925">
+          <a:bodyPr spcFirstLastPara="1" wrap="square" lIns="176925" tIns="176925" rIns="176925" bIns="176925" anchor="t" anchorCtr="0">
             <a:normAutofit/>
           </a:bodyPr>
           <a:lstStyle>
@@ -1085,15 +1111,19 @@
               <a:defRPr sz="5400"/>
             </a:lvl9pPr>
           </a:lstStyle>
-          <a:p/>
+          <a:p>
+            <a:endParaRPr/>
+          </a:p>
         </p:txBody>
       </p:sp>
       <p:sp>
         <p:nvSpPr>
           <p:cNvPr id="12" name="Google Shape;12;p2"/>
-          <p:cNvSpPr txBox="1"/>
+          <p:cNvSpPr txBox="1">
+            <a:spLocks noGrp="1"/>
+          </p:cNvSpPr>
           <p:nvPr>
-            <p:ph idx="12" type="sldNum"/>
+            <p:ph type="sldNum" idx="12"/>
           </p:nvPr>
         </p:nvSpPr>
         <p:spPr>
@@ -1106,7 +1136,7 @@
           </a:prstGeom>
         </p:spPr>
         <p:txBody>
-          <a:bodyPr anchorCtr="0" anchor="ctr" bIns="176925" lIns="176925" spcFirstLastPara="1" rIns="176925" wrap="square" tIns="176925">
+          <a:bodyPr spcFirstLastPara="1" wrap="square" lIns="176925" tIns="176925" rIns="176925" bIns="176925" anchor="ctr" anchorCtr="0">
             <a:normAutofit/>
           </a:bodyPr>
           <a:lstStyle>
@@ -1148,7 +1178,7 @@
             </a:lvl9pPr>
           </a:lstStyle>
           <a:p>
-            <a:pPr indent="0" lvl="0" marL="0" rtl="0" algn="r">
+            <a:pPr marL="0" lvl="0" indent="0" algn="r" rtl="0">
               <a:spcBef>
                 <a:spcPts val="0"/>
               </a:spcBef>
@@ -1174,11 +1204,11 @@
 </file>
 
 <file path=ppt/slideLayouts/slideLayout10.xml><?xml version="1.0" encoding="utf-8"?>
-<p:sldLayout xmlns:a="http://schemas.openxmlformats.org/drawingml/2006/main" xmlns:r="http://schemas.openxmlformats.org/officeDocument/2006/relationships" xmlns:mc="http://schemas.openxmlformats.org/markup-compatibility/2006" xmlns:mv="urn:schemas-microsoft-com:mac:vml" xmlns:p="http://schemas.openxmlformats.org/presentationml/2006/main" xmlns:c="http://schemas.openxmlformats.org/drawingml/2006/chart" xmlns:dgm="http://schemas.openxmlformats.org/drawingml/2006/diagram" xmlns:o="urn:schemas-microsoft-com:office:office" xmlns:v="urn:schemas-microsoft-com:vml" xmlns:pvml="urn:schemas-microsoft-com:office:powerpoint" xmlns:com="http://schemas.openxmlformats.org/drawingml/2006/compatibility" xmlns:p14="http://schemas.microsoft.com/office/powerpoint/2010/main" xmlns:p15="http://schemas.microsoft.com/office/powerpoint/2012/main" xmlns:ahyp="http://schemas.microsoft.com/office/drawing/2018/hyperlinkcolor" matchingName="Big number">
+<p:sldLayout xmlns:a="http://schemas.openxmlformats.org/drawingml/2006/main" xmlns:r="http://schemas.openxmlformats.org/officeDocument/2006/relationships" xmlns:p="http://schemas.openxmlformats.org/presentationml/2006/main" matchingName="Big number">
   <p:cSld name="BIG_NUMBER">
     <p:spTree>
       <p:nvGrpSpPr>
-        <p:cNvPr id="44" name="Shape 44"/>
+        <p:cNvPr id="1" name="Shape 44"/>
         <p:cNvGrpSpPr/>
         <p:nvPr/>
       </p:nvGrpSpPr>
@@ -1193,9 +1223,11 @@
       <p:sp>
         <p:nvSpPr>
           <p:cNvPr id="45" name="Google Shape;45;p11"/>
-          <p:cNvSpPr txBox="1"/>
+          <p:cNvSpPr txBox="1">
+            <a:spLocks noGrp="1"/>
+          </p:cNvSpPr>
           <p:nvPr>
-            <p:ph hasCustomPrompt="1" type="title"/>
+            <p:ph type="title" hasCustomPrompt="1"/>
           </p:nvPr>
         </p:nvSpPr>
         <p:spPr>
@@ -1208,7 +1240,7 @@
           </a:prstGeom>
         </p:spPr>
         <p:txBody>
-          <a:bodyPr anchorCtr="0" anchor="b" bIns="176925" lIns="176925" spcFirstLastPara="1" rIns="176925" wrap="square" tIns="176925">
+          <a:bodyPr spcFirstLastPara="1" wrap="square" lIns="176925" tIns="176925" rIns="176925" bIns="176925" anchor="b" anchorCtr="0">
             <a:normAutofit/>
           </a:bodyPr>
           <a:lstStyle>
@@ -1322,9 +1354,11 @@
       <p:sp>
         <p:nvSpPr>
           <p:cNvPr id="46" name="Google Shape;46;p11"/>
-          <p:cNvSpPr txBox="1"/>
+          <p:cNvSpPr txBox="1">
+            <a:spLocks noGrp="1"/>
+          </p:cNvSpPr>
           <p:nvPr>
-            <p:ph idx="1" type="body"/>
+            <p:ph type="body" idx="1"/>
           </p:nvPr>
         </p:nvSpPr>
         <p:spPr>
@@ -1337,11 +1371,11 @@
           </a:prstGeom>
         </p:spPr>
         <p:txBody>
-          <a:bodyPr anchorCtr="0" anchor="t" bIns="176925" lIns="176925" spcFirstLastPara="1" rIns="176925" wrap="square" tIns="176925">
+          <a:bodyPr spcFirstLastPara="1" wrap="square" lIns="176925" tIns="176925" rIns="176925" bIns="176925" anchor="t" anchorCtr="0">
             <a:normAutofit/>
           </a:bodyPr>
           <a:lstStyle>
-            <a:lvl1pPr indent="-450850" lvl="0" marL="457200" algn="ctr">
+            <a:lvl1pPr marL="457200" lvl="0" indent="-450850" algn="ctr">
               <a:spcBef>
                 <a:spcPts val="0"/>
               </a:spcBef>
@@ -1352,7 +1386,7 @@
               <a:buChar char="●"/>
               <a:defRPr/>
             </a:lvl1pPr>
-            <a:lvl2pPr indent="-400050" lvl="1" marL="914400" algn="ctr">
+            <a:lvl2pPr marL="914400" lvl="1" indent="-400050" algn="ctr">
               <a:spcBef>
                 <a:spcPts val="0"/>
               </a:spcBef>
@@ -1363,7 +1397,7 @@
               <a:buChar char="○"/>
               <a:defRPr/>
             </a:lvl2pPr>
-            <a:lvl3pPr indent="-400050" lvl="2" marL="1371600" algn="ctr">
+            <a:lvl3pPr marL="1371600" lvl="2" indent="-400050" algn="ctr">
               <a:spcBef>
                 <a:spcPts val="0"/>
               </a:spcBef>
@@ -1374,7 +1408,7 @@
               <a:buChar char="■"/>
               <a:defRPr/>
             </a:lvl3pPr>
-            <a:lvl4pPr indent="-400050" lvl="3" marL="1828800" algn="ctr">
+            <a:lvl4pPr marL="1828800" lvl="3" indent="-400050" algn="ctr">
               <a:spcBef>
                 <a:spcPts val="0"/>
               </a:spcBef>
@@ -1385,7 +1419,7 @@
               <a:buChar char="●"/>
               <a:defRPr/>
             </a:lvl4pPr>
-            <a:lvl5pPr indent="-400050" lvl="4" marL="2286000" algn="ctr">
+            <a:lvl5pPr marL="2286000" lvl="4" indent="-400050" algn="ctr">
               <a:spcBef>
                 <a:spcPts val="0"/>
               </a:spcBef>
@@ -1396,7 +1430,7 @@
               <a:buChar char="○"/>
               <a:defRPr/>
             </a:lvl5pPr>
-            <a:lvl6pPr indent="-400050" lvl="5" marL="2743200" algn="ctr">
+            <a:lvl6pPr marL="2743200" lvl="5" indent="-400050" algn="ctr">
               <a:spcBef>
                 <a:spcPts val="0"/>
               </a:spcBef>
@@ -1407,7 +1441,7 @@
               <a:buChar char="■"/>
               <a:defRPr/>
             </a:lvl6pPr>
-            <a:lvl7pPr indent="-400050" lvl="6" marL="3200400" algn="ctr">
+            <a:lvl7pPr marL="3200400" lvl="6" indent="-400050" algn="ctr">
               <a:spcBef>
                 <a:spcPts val="0"/>
               </a:spcBef>
@@ -1418,7 +1452,7 @@
               <a:buChar char="●"/>
               <a:defRPr/>
             </a:lvl7pPr>
-            <a:lvl8pPr indent="-400050" lvl="7" marL="3657600" algn="ctr">
+            <a:lvl8pPr marL="3657600" lvl="7" indent="-400050" algn="ctr">
               <a:spcBef>
                 <a:spcPts val="0"/>
               </a:spcBef>
@@ -1429,7 +1463,7 @@
               <a:buChar char="○"/>
               <a:defRPr/>
             </a:lvl8pPr>
-            <a:lvl9pPr indent="-400050" lvl="8" marL="4114800" algn="ctr">
+            <a:lvl9pPr marL="4114800" lvl="8" indent="-400050" algn="ctr">
               <a:spcBef>
                 <a:spcPts val="0"/>
               </a:spcBef>
@@ -1441,15 +1475,19 @@
               <a:defRPr/>
             </a:lvl9pPr>
           </a:lstStyle>
-          <a:p/>
+          <a:p>
+            <a:endParaRPr/>
+          </a:p>
         </p:txBody>
       </p:sp>
       <p:sp>
         <p:nvSpPr>
           <p:cNvPr id="47" name="Google Shape;47;p11"/>
-          <p:cNvSpPr txBox="1"/>
+          <p:cNvSpPr txBox="1">
+            <a:spLocks noGrp="1"/>
+          </p:cNvSpPr>
           <p:nvPr>
-            <p:ph idx="12" type="sldNum"/>
+            <p:ph type="sldNum" idx="12"/>
           </p:nvPr>
         </p:nvSpPr>
         <p:spPr>
@@ -1462,7 +1500,7 @@
           </a:prstGeom>
         </p:spPr>
         <p:txBody>
-          <a:bodyPr anchorCtr="0" anchor="ctr" bIns="176925" lIns="176925" spcFirstLastPara="1" rIns="176925" wrap="square" tIns="176925">
+          <a:bodyPr spcFirstLastPara="1" wrap="square" lIns="176925" tIns="176925" rIns="176925" bIns="176925" anchor="ctr" anchorCtr="0">
             <a:normAutofit/>
           </a:bodyPr>
           <a:lstStyle>
@@ -1504,7 +1542,7 @@
             </a:lvl9pPr>
           </a:lstStyle>
           <a:p>
-            <a:pPr indent="0" lvl="0" marL="0" rtl="0" algn="r">
+            <a:pPr marL="0" lvl="0" indent="0" algn="r" rtl="0">
               <a:spcBef>
                 <a:spcPts val="0"/>
               </a:spcBef>
@@ -1530,11 +1568,11 @@
 </file>
 
 <file path=ppt/slideLayouts/slideLayout11.xml><?xml version="1.0" encoding="utf-8"?>
-<p:sldLayout xmlns:a="http://schemas.openxmlformats.org/drawingml/2006/main" xmlns:r="http://schemas.openxmlformats.org/officeDocument/2006/relationships" xmlns:mc="http://schemas.openxmlformats.org/markup-compatibility/2006" xmlns:mv="urn:schemas-microsoft-com:mac:vml" xmlns:p="http://schemas.openxmlformats.org/presentationml/2006/main" xmlns:c="http://schemas.openxmlformats.org/drawingml/2006/chart" xmlns:dgm="http://schemas.openxmlformats.org/drawingml/2006/diagram" xmlns:o="urn:schemas-microsoft-com:office:office" xmlns:v="urn:schemas-microsoft-com:vml" xmlns:pvml="urn:schemas-microsoft-com:office:powerpoint" xmlns:com="http://schemas.openxmlformats.org/drawingml/2006/compatibility" xmlns:p14="http://schemas.microsoft.com/office/powerpoint/2010/main" xmlns:p15="http://schemas.microsoft.com/office/powerpoint/2012/main" xmlns:ahyp="http://schemas.microsoft.com/office/drawing/2018/hyperlinkcolor" matchingName="Blank" type="blank">
+<p:sldLayout xmlns:a="http://schemas.openxmlformats.org/drawingml/2006/main" xmlns:r="http://schemas.openxmlformats.org/officeDocument/2006/relationships" xmlns:p="http://schemas.openxmlformats.org/presentationml/2006/main" matchingName="Blank" type="blank">
   <p:cSld name="BLANK">
     <p:spTree>
       <p:nvGrpSpPr>
-        <p:cNvPr id="48" name="Shape 48"/>
+        <p:cNvPr id="1" name="Shape 48"/>
         <p:cNvGrpSpPr/>
         <p:nvPr/>
       </p:nvGrpSpPr>
@@ -1549,9 +1587,11 @@
       <p:sp>
         <p:nvSpPr>
           <p:cNvPr id="49" name="Google Shape;49;p12"/>
-          <p:cNvSpPr txBox="1"/>
+          <p:cNvSpPr txBox="1">
+            <a:spLocks noGrp="1"/>
+          </p:cNvSpPr>
           <p:nvPr>
-            <p:ph idx="12" type="sldNum"/>
+            <p:ph type="sldNum" idx="12"/>
           </p:nvPr>
         </p:nvSpPr>
         <p:spPr>
@@ -1564,7 +1604,7 @@
           </a:prstGeom>
         </p:spPr>
         <p:txBody>
-          <a:bodyPr anchorCtr="0" anchor="ctr" bIns="176925" lIns="176925" spcFirstLastPara="1" rIns="176925" wrap="square" tIns="176925">
+          <a:bodyPr spcFirstLastPara="1" wrap="square" lIns="176925" tIns="176925" rIns="176925" bIns="176925" anchor="ctr" anchorCtr="0">
             <a:normAutofit/>
           </a:bodyPr>
           <a:lstStyle>
@@ -1606,7 +1646,7 @@
             </a:lvl9pPr>
           </a:lstStyle>
           <a:p>
-            <a:pPr indent="0" lvl="0" marL="0" rtl="0" algn="r">
+            <a:pPr marL="0" lvl="0" indent="0" algn="r" rtl="0">
               <a:spcBef>
                 <a:spcPts val="0"/>
               </a:spcBef>
@@ -1632,11 +1672,11 @@
 </file>
 
 <file path=ppt/slideLayouts/slideLayout2.xml><?xml version="1.0" encoding="utf-8"?>
-<p:sldLayout xmlns:a="http://schemas.openxmlformats.org/drawingml/2006/main" xmlns:r="http://schemas.openxmlformats.org/officeDocument/2006/relationships" xmlns:mc="http://schemas.openxmlformats.org/markup-compatibility/2006" xmlns:mv="urn:schemas-microsoft-com:mac:vml" xmlns:p="http://schemas.openxmlformats.org/presentationml/2006/main" xmlns:c="http://schemas.openxmlformats.org/drawingml/2006/chart" xmlns:dgm="http://schemas.openxmlformats.org/drawingml/2006/diagram" xmlns:o="urn:schemas-microsoft-com:office:office" xmlns:v="urn:schemas-microsoft-com:vml" xmlns:pvml="urn:schemas-microsoft-com:office:powerpoint" xmlns:com="http://schemas.openxmlformats.org/drawingml/2006/compatibility" xmlns:p14="http://schemas.microsoft.com/office/powerpoint/2010/main" xmlns:p15="http://schemas.microsoft.com/office/powerpoint/2012/main" xmlns:ahyp="http://schemas.microsoft.com/office/drawing/2018/hyperlinkcolor" matchingName="Section header" type="secHead">
+<p:sldLayout xmlns:a="http://schemas.openxmlformats.org/drawingml/2006/main" xmlns:r="http://schemas.openxmlformats.org/officeDocument/2006/relationships" xmlns:p="http://schemas.openxmlformats.org/presentationml/2006/main" matchingName="Section header" type="secHead">
   <p:cSld name="SECTION_HEADER">
     <p:spTree>
       <p:nvGrpSpPr>
-        <p:cNvPr id="13" name="Shape 13"/>
+        <p:cNvPr id="1" name="Shape 13"/>
         <p:cNvGrpSpPr/>
         <p:nvPr/>
       </p:nvGrpSpPr>
@@ -1651,7 +1691,9 @@
       <p:sp>
         <p:nvSpPr>
           <p:cNvPr id="14" name="Google Shape;14;p3"/>
-          <p:cNvSpPr txBox="1"/>
+          <p:cNvSpPr txBox="1">
+            <a:spLocks noGrp="1"/>
+          </p:cNvSpPr>
           <p:nvPr>
             <p:ph type="title"/>
           </p:nvPr>
@@ -1666,7 +1708,7 @@
           </a:prstGeom>
         </p:spPr>
         <p:txBody>
-          <a:bodyPr anchorCtr="0" anchor="ctr" bIns="176925" lIns="176925" spcFirstLastPara="1" rIns="176925" wrap="square" tIns="176925">
+          <a:bodyPr spcFirstLastPara="1" wrap="square" lIns="176925" tIns="176925" rIns="176925" bIns="176925" anchor="ctr" anchorCtr="0">
             <a:normAutofit/>
           </a:bodyPr>
           <a:lstStyle>
@@ -1770,15 +1812,19 @@
               <a:defRPr sz="7000"/>
             </a:lvl9pPr>
           </a:lstStyle>
-          <a:p/>
+          <a:p>
+            <a:endParaRPr/>
+          </a:p>
         </p:txBody>
       </p:sp>
       <p:sp>
         <p:nvSpPr>
           <p:cNvPr id="15" name="Google Shape;15;p3"/>
-          <p:cNvSpPr txBox="1"/>
+          <p:cNvSpPr txBox="1">
+            <a:spLocks noGrp="1"/>
+          </p:cNvSpPr>
           <p:nvPr>
-            <p:ph idx="12" type="sldNum"/>
+            <p:ph type="sldNum" idx="12"/>
           </p:nvPr>
         </p:nvSpPr>
         <p:spPr>
@@ -1791,7 +1837,7 @@
           </a:prstGeom>
         </p:spPr>
         <p:txBody>
-          <a:bodyPr anchorCtr="0" anchor="ctr" bIns="176925" lIns="176925" spcFirstLastPara="1" rIns="176925" wrap="square" tIns="176925">
+          <a:bodyPr spcFirstLastPara="1" wrap="square" lIns="176925" tIns="176925" rIns="176925" bIns="176925" anchor="ctr" anchorCtr="0">
             <a:normAutofit/>
           </a:bodyPr>
           <a:lstStyle>
@@ -1833,7 +1879,7 @@
             </a:lvl9pPr>
           </a:lstStyle>
           <a:p>
-            <a:pPr indent="0" lvl="0" marL="0" rtl="0" algn="r">
+            <a:pPr marL="0" lvl="0" indent="0" algn="r" rtl="0">
               <a:spcBef>
                 <a:spcPts val="0"/>
               </a:spcBef>
@@ -1859,11 +1905,11 @@
 </file>
 
 <file path=ppt/slideLayouts/slideLayout3.xml><?xml version="1.0" encoding="utf-8"?>
-<p:sldLayout xmlns:a="http://schemas.openxmlformats.org/drawingml/2006/main" xmlns:r="http://schemas.openxmlformats.org/officeDocument/2006/relationships" xmlns:mc="http://schemas.openxmlformats.org/markup-compatibility/2006" xmlns:mv="urn:schemas-microsoft-com:mac:vml" xmlns:p="http://schemas.openxmlformats.org/presentationml/2006/main" xmlns:c="http://schemas.openxmlformats.org/drawingml/2006/chart" xmlns:dgm="http://schemas.openxmlformats.org/drawingml/2006/diagram" xmlns:o="urn:schemas-microsoft-com:office:office" xmlns:v="urn:schemas-microsoft-com:vml" xmlns:pvml="urn:schemas-microsoft-com:office:powerpoint" xmlns:com="http://schemas.openxmlformats.org/drawingml/2006/compatibility" xmlns:p14="http://schemas.microsoft.com/office/powerpoint/2010/main" xmlns:p15="http://schemas.microsoft.com/office/powerpoint/2012/main" xmlns:ahyp="http://schemas.microsoft.com/office/drawing/2018/hyperlinkcolor" matchingName="Title and body" type="tx">
+<p:sldLayout xmlns:a="http://schemas.openxmlformats.org/drawingml/2006/main" xmlns:r="http://schemas.openxmlformats.org/officeDocument/2006/relationships" xmlns:p="http://schemas.openxmlformats.org/presentationml/2006/main" matchingName="Title and body" type="tx">
   <p:cSld name="TITLE_AND_BODY">
     <p:spTree>
       <p:nvGrpSpPr>
-        <p:cNvPr id="16" name="Shape 16"/>
+        <p:cNvPr id="1" name="Shape 16"/>
         <p:cNvGrpSpPr/>
         <p:nvPr/>
       </p:nvGrpSpPr>
@@ -1878,7 +1924,9 @@
       <p:sp>
         <p:nvSpPr>
           <p:cNvPr id="17" name="Google Shape;17;p4"/>
-          <p:cNvSpPr txBox="1"/>
+          <p:cNvSpPr txBox="1">
+            <a:spLocks noGrp="1"/>
+          </p:cNvSpPr>
           <p:nvPr>
             <p:ph type="title"/>
           </p:nvPr>
@@ -1893,7 +1941,7 @@
           </a:prstGeom>
         </p:spPr>
         <p:txBody>
-          <a:bodyPr anchorCtr="0" anchor="t" bIns="176925" lIns="176925" spcFirstLastPara="1" rIns="176925" wrap="square" tIns="176925">
+          <a:bodyPr spcFirstLastPara="1" wrap="square" lIns="176925" tIns="176925" rIns="176925" bIns="176925" anchor="t" anchorCtr="0">
             <a:normAutofit/>
           </a:bodyPr>
           <a:lstStyle>
@@ -1997,15 +2045,19 @@
               <a:defRPr/>
             </a:lvl9pPr>
           </a:lstStyle>
-          <a:p/>
+          <a:p>
+            <a:endParaRPr/>
+          </a:p>
         </p:txBody>
       </p:sp>
       <p:sp>
         <p:nvSpPr>
           <p:cNvPr id="18" name="Google Shape;18;p4"/>
-          <p:cNvSpPr txBox="1"/>
+          <p:cNvSpPr txBox="1">
+            <a:spLocks noGrp="1"/>
+          </p:cNvSpPr>
           <p:nvPr>
-            <p:ph idx="1" type="body"/>
+            <p:ph type="body" idx="1"/>
           </p:nvPr>
         </p:nvSpPr>
         <p:spPr>
@@ -2018,11 +2070,11 @@
           </a:prstGeom>
         </p:spPr>
         <p:txBody>
-          <a:bodyPr anchorCtr="0" anchor="t" bIns="176925" lIns="176925" spcFirstLastPara="1" rIns="176925" wrap="square" tIns="176925">
+          <a:bodyPr spcFirstLastPara="1" wrap="square" lIns="176925" tIns="176925" rIns="176925" bIns="176925" anchor="t" anchorCtr="0">
             <a:normAutofit/>
           </a:bodyPr>
           <a:lstStyle>
-            <a:lvl1pPr indent="-450850" lvl="0" marL="457200">
+            <a:lvl1pPr marL="457200" lvl="0" indent="-450850">
               <a:spcBef>
                 <a:spcPts val="0"/>
               </a:spcBef>
@@ -2033,7 +2085,7 @@
               <a:buChar char="●"/>
               <a:defRPr/>
             </a:lvl1pPr>
-            <a:lvl2pPr indent="-400050" lvl="1" marL="914400">
+            <a:lvl2pPr marL="914400" lvl="1" indent="-400050">
               <a:spcBef>
                 <a:spcPts val="0"/>
               </a:spcBef>
@@ -2044,7 +2096,7 @@
               <a:buChar char="○"/>
               <a:defRPr/>
             </a:lvl2pPr>
-            <a:lvl3pPr indent="-400050" lvl="2" marL="1371600">
+            <a:lvl3pPr marL="1371600" lvl="2" indent="-400050">
               <a:spcBef>
                 <a:spcPts val="0"/>
               </a:spcBef>
@@ -2055,7 +2107,7 @@
               <a:buChar char="■"/>
               <a:defRPr/>
             </a:lvl3pPr>
-            <a:lvl4pPr indent="-400050" lvl="3" marL="1828800">
+            <a:lvl4pPr marL="1828800" lvl="3" indent="-400050">
               <a:spcBef>
                 <a:spcPts val="0"/>
               </a:spcBef>
@@ -2066,7 +2118,7 @@
               <a:buChar char="●"/>
               <a:defRPr/>
             </a:lvl4pPr>
-            <a:lvl5pPr indent="-400050" lvl="4" marL="2286000">
+            <a:lvl5pPr marL="2286000" lvl="4" indent="-400050">
               <a:spcBef>
                 <a:spcPts val="0"/>
               </a:spcBef>
@@ -2077,7 +2129,7 @@
               <a:buChar char="○"/>
               <a:defRPr/>
             </a:lvl5pPr>
-            <a:lvl6pPr indent="-400050" lvl="5" marL="2743200">
+            <a:lvl6pPr marL="2743200" lvl="5" indent="-400050">
               <a:spcBef>
                 <a:spcPts val="0"/>
               </a:spcBef>
@@ -2088,7 +2140,7 @@
               <a:buChar char="■"/>
               <a:defRPr/>
             </a:lvl6pPr>
-            <a:lvl7pPr indent="-400050" lvl="6" marL="3200400">
+            <a:lvl7pPr marL="3200400" lvl="6" indent="-400050">
               <a:spcBef>
                 <a:spcPts val="0"/>
               </a:spcBef>
@@ -2099,7 +2151,7 @@
               <a:buChar char="●"/>
               <a:defRPr/>
             </a:lvl7pPr>
-            <a:lvl8pPr indent="-400050" lvl="7" marL="3657600">
+            <a:lvl8pPr marL="3657600" lvl="7" indent="-400050">
               <a:spcBef>
                 <a:spcPts val="0"/>
               </a:spcBef>
@@ -2110,7 +2162,7 @@
               <a:buChar char="○"/>
               <a:defRPr/>
             </a:lvl8pPr>
-            <a:lvl9pPr indent="-400050" lvl="8" marL="4114800">
+            <a:lvl9pPr marL="4114800" lvl="8" indent="-400050">
               <a:spcBef>
                 <a:spcPts val="0"/>
               </a:spcBef>
@@ -2122,15 +2174,19 @@
               <a:defRPr/>
             </a:lvl9pPr>
           </a:lstStyle>
-          <a:p/>
+          <a:p>
+            <a:endParaRPr/>
+          </a:p>
         </p:txBody>
       </p:sp>
       <p:sp>
         <p:nvSpPr>
           <p:cNvPr id="19" name="Google Shape;19;p4"/>
-          <p:cNvSpPr txBox="1"/>
+          <p:cNvSpPr txBox="1">
+            <a:spLocks noGrp="1"/>
+          </p:cNvSpPr>
           <p:nvPr>
-            <p:ph idx="12" type="sldNum"/>
+            <p:ph type="sldNum" idx="12"/>
           </p:nvPr>
         </p:nvSpPr>
         <p:spPr>
@@ -2143,7 +2199,7 @@
           </a:prstGeom>
         </p:spPr>
         <p:txBody>
-          <a:bodyPr anchorCtr="0" anchor="ctr" bIns="176925" lIns="176925" spcFirstLastPara="1" rIns="176925" wrap="square" tIns="176925">
+          <a:bodyPr spcFirstLastPara="1" wrap="square" lIns="176925" tIns="176925" rIns="176925" bIns="176925" anchor="ctr" anchorCtr="0">
             <a:normAutofit/>
           </a:bodyPr>
           <a:lstStyle>
@@ -2185,7 +2241,7 @@
             </a:lvl9pPr>
           </a:lstStyle>
           <a:p>
-            <a:pPr indent="0" lvl="0" marL="0" rtl="0" algn="r">
+            <a:pPr marL="0" lvl="0" indent="0" algn="r" rtl="0">
               <a:spcBef>
                 <a:spcPts val="0"/>
               </a:spcBef>
@@ -2211,11 +2267,11 @@
 </file>
 
 <file path=ppt/slideLayouts/slideLayout4.xml><?xml version="1.0" encoding="utf-8"?>
-<p:sldLayout xmlns:a="http://schemas.openxmlformats.org/drawingml/2006/main" xmlns:r="http://schemas.openxmlformats.org/officeDocument/2006/relationships" xmlns:mc="http://schemas.openxmlformats.org/markup-compatibility/2006" xmlns:mv="urn:schemas-microsoft-com:mac:vml" xmlns:p="http://schemas.openxmlformats.org/presentationml/2006/main" xmlns:c="http://schemas.openxmlformats.org/drawingml/2006/chart" xmlns:dgm="http://schemas.openxmlformats.org/drawingml/2006/diagram" xmlns:o="urn:schemas-microsoft-com:office:office" xmlns:v="urn:schemas-microsoft-com:vml" xmlns:pvml="urn:schemas-microsoft-com:office:powerpoint" xmlns:com="http://schemas.openxmlformats.org/drawingml/2006/compatibility" xmlns:p14="http://schemas.microsoft.com/office/powerpoint/2010/main" xmlns:p15="http://schemas.microsoft.com/office/powerpoint/2012/main" xmlns:ahyp="http://schemas.microsoft.com/office/drawing/2018/hyperlinkcolor" matchingName="Title and two columns" type="twoColTx">
+<p:sldLayout xmlns:a="http://schemas.openxmlformats.org/drawingml/2006/main" xmlns:r="http://schemas.openxmlformats.org/officeDocument/2006/relationships" xmlns:p="http://schemas.openxmlformats.org/presentationml/2006/main" matchingName="Title and two columns" type="twoColTx">
   <p:cSld name="TITLE_AND_TWO_COLUMNS">
     <p:spTree>
       <p:nvGrpSpPr>
-        <p:cNvPr id="20" name="Shape 20"/>
+        <p:cNvPr id="1" name="Shape 20"/>
         <p:cNvGrpSpPr/>
         <p:nvPr/>
       </p:nvGrpSpPr>
@@ -2230,7 +2286,9 @@
       <p:sp>
         <p:nvSpPr>
           <p:cNvPr id="21" name="Google Shape;21;p5"/>
-          <p:cNvSpPr txBox="1"/>
+          <p:cNvSpPr txBox="1">
+            <a:spLocks noGrp="1"/>
+          </p:cNvSpPr>
           <p:nvPr>
             <p:ph type="title"/>
           </p:nvPr>
@@ -2245,7 +2303,7 @@
           </a:prstGeom>
         </p:spPr>
         <p:txBody>
-          <a:bodyPr anchorCtr="0" anchor="t" bIns="176925" lIns="176925" spcFirstLastPara="1" rIns="176925" wrap="square" tIns="176925">
+          <a:bodyPr spcFirstLastPara="1" wrap="square" lIns="176925" tIns="176925" rIns="176925" bIns="176925" anchor="t" anchorCtr="0">
             <a:normAutofit/>
           </a:bodyPr>
           <a:lstStyle>
@@ -2349,15 +2407,19 @@
               <a:defRPr/>
             </a:lvl9pPr>
           </a:lstStyle>
-          <a:p/>
+          <a:p>
+            <a:endParaRPr/>
+          </a:p>
         </p:txBody>
       </p:sp>
       <p:sp>
         <p:nvSpPr>
           <p:cNvPr id="22" name="Google Shape;22;p5"/>
-          <p:cNvSpPr txBox="1"/>
+          <p:cNvSpPr txBox="1">
+            <a:spLocks noGrp="1"/>
+          </p:cNvSpPr>
           <p:nvPr>
-            <p:ph idx="1" type="body"/>
+            <p:ph type="body" idx="1"/>
           </p:nvPr>
         </p:nvSpPr>
         <p:spPr>
@@ -2370,11 +2432,11 @@
           </a:prstGeom>
         </p:spPr>
         <p:txBody>
-          <a:bodyPr anchorCtr="0" anchor="t" bIns="176925" lIns="176925" spcFirstLastPara="1" rIns="176925" wrap="square" tIns="176925">
+          <a:bodyPr spcFirstLastPara="1" wrap="square" lIns="176925" tIns="176925" rIns="176925" bIns="176925" anchor="t" anchorCtr="0">
             <a:normAutofit/>
           </a:bodyPr>
           <a:lstStyle>
-            <a:lvl1pPr indent="-400050" lvl="0" marL="457200">
+            <a:lvl1pPr marL="457200" lvl="0" indent="-400050">
               <a:spcBef>
                 <a:spcPts val="0"/>
               </a:spcBef>
@@ -2385,7 +2447,7 @@
               <a:buChar char="●"/>
               <a:defRPr sz="2700"/>
             </a:lvl1pPr>
-            <a:lvl2pPr indent="-374650" lvl="1" marL="914400">
+            <a:lvl2pPr marL="914400" lvl="1" indent="-374650">
               <a:spcBef>
                 <a:spcPts val="0"/>
               </a:spcBef>
@@ -2396,7 +2458,7 @@
               <a:buChar char="○"/>
               <a:defRPr sz="2300"/>
             </a:lvl2pPr>
-            <a:lvl3pPr indent="-374650" lvl="2" marL="1371600">
+            <a:lvl3pPr marL="1371600" lvl="2" indent="-374650">
               <a:spcBef>
                 <a:spcPts val="0"/>
               </a:spcBef>
@@ -2407,7 +2469,7 @@
               <a:buChar char="■"/>
               <a:defRPr sz="2300"/>
             </a:lvl3pPr>
-            <a:lvl4pPr indent="-374650" lvl="3" marL="1828800">
+            <a:lvl4pPr marL="1828800" lvl="3" indent="-374650">
               <a:spcBef>
                 <a:spcPts val="0"/>
               </a:spcBef>
@@ -2418,7 +2480,7 @@
               <a:buChar char="●"/>
               <a:defRPr sz="2300"/>
             </a:lvl4pPr>
-            <a:lvl5pPr indent="-374650" lvl="4" marL="2286000">
+            <a:lvl5pPr marL="2286000" lvl="4" indent="-374650">
               <a:spcBef>
                 <a:spcPts val="0"/>
               </a:spcBef>
@@ -2429,7 +2491,7 @@
               <a:buChar char="○"/>
               <a:defRPr sz="2300"/>
             </a:lvl5pPr>
-            <a:lvl6pPr indent="-374650" lvl="5" marL="2743200">
+            <a:lvl6pPr marL="2743200" lvl="5" indent="-374650">
               <a:spcBef>
                 <a:spcPts val="0"/>
               </a:spcBef>
@@ -2440,7 +2502,7 @@
               <a:buChar char="■"/>
               <a:defRPr sz="2300"/>
             </a:lvl6pPr>
-            <a:lvl7pPr indent="-374650" lvl="6" marL="3200400">
+            <a:lvl7pPr marL="3200400" lvl="6" indent="-374650">
               <a:spcBef>
                 <a:spcPts val="0"/>
               </a:spcBef>
@@ -2451,7 +2513,7 @@
               <a:buChar char="●"/>
               <a:defRPr sz="2300"/>
             </a:lvl7pPr>
-            <a:lvl8pPr indent="-374650" lvl="7" marL="3657600">
+            <a:lvl8pPr marL="3657600" lvl="7" indent="-374650">
               <a:spcBef>
                 <a:spcPts val="0"/>
               </a:spcBef>
@@ -2462,7 +2524,7 @@
               <a:buChar char="○"/>
               <a:defRPr sz="2300"/>
             </a:lvl8pPr>
-            <a:lvl9pPr indent="-374650" lvl="8" marL="4114800">
+            <a:lvl9pPr marL="4114800" lvl="8" indent="-374650">
               <a:spcBef>
                 <a:spcPts val="0"/>
               </a:spcBef>
@@ -2474,15 +2536,19 @@
               <a:defRPr sz="2300"/>
             </a:lvl9pPr>
           </a:lstStyle>
-          <a:p/>
+          <a:p>
+            <a:endParaRPr/>
+          </a:p>
         </p:txBody>
       </p:sp>
       <p:sp>
         <p:nvSpPr>
           <p:cNvPr id="23" name="Google Shape;23;p5"/>
-          <p:cNvSpPr txBox="1"/>
+          <p:cNvSpPr txBox="1">
+            <a:spLocks noGrp="1"/>
+          </p:cNvSpPr>
           <p:nvPr>
-            <p:ph idx="2" type="body"/>
+            <p:ph type="body" idx="2"/>
           </p:nvPr>
         </p:nvSpPr>
         <p:spPr>
@@ -2495,11 +2561,11 @@
           </a:prstGeom>
         </p:spPr>
         <p:txBody>
-          <a:bodyPr anchorCtr="0" anchor="t" bIns="176925" lIns="176925" spcFirstLastPara="1" rIns="176925" wrap="square" tIns="176925">
+          <a:bodyPr spcFirstLastPara="1" wrap="square" lIns="176925" tIns="176925" rIns="176925" bIns="176925" anchor="t" anchorCtr="0">
             <a:normAutofit/>
           </a:bodyPr>
           <a:lstStyle>
-            <a:lvl1pPr indent="-400050" lvl="0" marL="457200">
+            <a:lvl1pPr marL="457200" lvl="0" indent="-400050">
               <a:spcBef>
                 <a:spcPts val="0"/>
               </a:spcBef>
@@ -2510,7 +2576,7 @@
               <a:buChar char="●"/>
               <a:defRPr sz="2700"/>
             </a:lvl1pPr>
-            <a:lvl2pPr indent="-374650" lvl="1" marL="914400">
+            <a:lvl2pPr marL="914400" lvl="1" indent="-374650">
               <a:spcBef>
                 <a:spcPts val="0"/>
               </a:spcBef>
@@ -2521,7 +2587,7 @@
               <a:buChar char="○"/>
               <a:defRPr sz="2300"/>
             </a:lvl2pPr>
-            <a:lvl3pPr indent="-374650" lvl="2" marL="1371600">
+            <a:lvl3pPr marL="1371600" lvl="2" indent="-374650">
               <a:spcBef>
                 <a:spcPts val="0"/>
               </a:spcBef>
@@ -2532,7 +2598,7 @@
               <a:buChar char="■"/>
               <a:defRPr sz="2300"/>
             </a:lvl3pPr>
-            <a:lvl4pPr indent="-374650" lvl="3" marL="1828800">
+            <a:lvl4pPr marL="1828800" lvl="3" indent="-374650">
               <a:spcBef>
                 <a:spcPts val="0"/>
               </a:spcBef>
@@ -2543,7 +2609,7 @@
               <a:buChar char="●"/>
               <a:defRPr sz="2300"/>
             </a:lvl4pPr>
-            <a:lvl5pPr indent="-374650" lvl="4" marL="2286000">
+            <a:lvl5pPr marL="2286000" lvl="4" indent="-374650">
               <a:spcBef>
                 <a:spcPts val="0"/>
               </a:spcBef>
@@ -2554,7 +2620,7 @@
               <a:buChar char="○"/>
               <a:defRPr sz="2300"/>
             </a:lvl5pPr>
-            <a:lvl6pPr indent="-374650" lvl="5" marL="2743200">
+            <a:lvl6pPr marL="2743200" lvl="5" indent="-374650">
               <a:spcBef>
                 <a:spcPts val="0"/>
               </a:spcBef>
@@ -2565,7 +2631,7 @@
               <a:buChar char="■"/>
               <a:defRPr sz="2300"/>
             </a:lvl6pPr>
-            <a:lvl7pPr indent="-374650" lvl="6" marL="3200400">
+            <a:lvl7pPr marL="3200400" lvl="6" indent="-374650">
               <a:spcBef>
                 <a:spcPts val="0"/>
               </a:spcBef>
@@ -2576,7 +2642,7 @@
               <a:buChar char="●"/>
               <a:defRPr sz="2300"/>
             </a:lvl7pPr>
-            <a:lvl8pPr indent="-374650" lvl="7" marL="3657600">
+            <a:lvl8pPr marL="3657600" lvl="7" indent="-374650">
               <a:spcBef>
                 <a:spcPts val="0"/>
               </a:spcBef>
@@ -2587,7 +2653,7 @@
               <a:buChar char="○"/>
               <a:defRPr sz="2300"/>
             </a:lvl8pPr>
-            <a:lvl9pPr indent="-374650" lvl="8" marL="4114800">
+            <a:lvl9pPr marL="4114800" lvl="8" indent="-374650">
               <a:spcBef>
                 <a:spcPts val="0"/>
               </a:spcBef>
@@ -2599,15 +2665,19 @@
               <a:defRPr sz="2300"/>
             </a:lvl9pPr>
           </a:lstStyle>
-          <a:p/>
+          <a:p>
+            <a:endParaRPr/>
+          </a:p>
         </p:txBody>
       </p:sp>
       <p:sp>
         <p:nvSpPr>
           <p:cNvPr id="24" name="Google Shape;24;p5"/>
-          <p:cNvSpPr txBox="1"/>
+          <p:cNvSpPr txBox="1">
+            <a:spLocks noGrp="1"/>
+          </p:cNvSpPr>
           <p:nvPr>
-            <p:ph idx="12" type="sldNum"/>
+            <p:ph type="sldNum" idx="12"/>
           </p:nvPr>
         </p:nvSpPr>
         <p:spPr>
@@ -2620,7 +2690,7 @@
           </a:prstGeom>
         </p:spPr>
         <p:txBody>
-          <a:bodyPr anchorCtr="0" anchor="ctr" bIns="176925" lIns="176925" spcFirstLastPara="1" rIns="176925" wrap="square" tIns="176925">
+          <a:bodyPr spcFirstLastPara="1" wrap="square" lIns="176925" tIns="176925" rIns="176925" bIns="176925" anchor="ctr" anchorCtr="0">
             <a:normAutofit/>
           </a:bodyPr>
           <a:lstStyle>
@@ -2662,7 +2732,7 @@
             </a:lvl9pPr>
           </a:lstStyle>
           <a:p>
-            <a:pPr indent="0" lvl="0" marL="0" rtl="0" algn="r">
+            <a:pPr marL="0" lvl="0" indent="0" algn="r" rtl="0">
               <a:spcBef>
                 <a:spcPts val="0"/>
               </a:spcBef>
@@ -2688,11 +2758,11 @@
 </file>
 
 <file path=ppt/slideLayouts/slideLayout5.xml><?xml version="1.0" encoding="utf-8"?>
-<p:sldLayout xmlns:a="http://schemas.openxmlformats.org/drawingml/2006/main" xmlns:r="http://schemas.openxmlformats.org/officeDocument/2006/relationships" xmlns:mc="http://schemas.openxmlformats.org/markup-compatibility/2006" xmlns:mv="urn:schemas-microsoft-com:mac:vml" xmlns:p="http://schemas.openxmlformats.org/presentationml/2006/main" xmlns:c="http://schemas.openxmlformats.org/drawingml/2006/chart" xmlns:dgm="http://schemas.openxmlformats.org/drawingml/2006/diagram" xmlns:o="urn:schemas-microsoft-com:office:office" xmlns:v="urn:schemas-microsoft-com:vml" xmlns:pvml="urn:schemas-microsoft-com:office:powerpoint" xmlns:com="http://schemas.openxmlformats.org/drawingml/2006/compatibility" xmlns:p14="http://schemas.microsoft.com/office/powerpoint/2010/main" xmlns:p15="http://schemas.microsoft.com/office/powerpoint/2012/main" xmlns:ahyp="http://schemas.microsoft.com/office/drawing/2018/hyperlinkcolor" matchingName="Title only" type="titleOnly">
+<p:sldLayout xmlns:a="http://schemas.openxmlformats.org/drawingml/2006/main" xmlns:r="http://schemas.openxmlformats.org/officeDocument/2006/relationships" xmlns:p="http://schemas.openxmlformats.org/presentationml/2006/main" matchingName="Title only" type="titleOnly">
   <p:cSld name="TITLE_ONLY">
     <p:spTree>
       <p:nvGrpSpPr>
-        <p:cNvPr id="25" name="Shape 25"/>
+        <p:cNvPr id="1" name="Shape 25"/>
         <p:cNvGrpSpPr/>
         <p:nvPr/>
       </p:nvGrpSpPr>
@@ -2707,7 +2777,9 @@
       <p:sp>
         <p:nvSpPr>
           <p:cNvPr id="26" name="Google Shape;26;p6"/>
-          <p:cNvSpPr txBox="1"/>
+          <p:cNvSpPr txBox="1">
+            <a:spLocks noGrp="1"/>
+          </p:cNvSpPr>
           <p:nvPr>
             <p:ph type="title"/>
           </p:nvPr>
@@ -2722,7 +2794,7 @@
           </a:prstGeom>
         </p:spPr>
         <p:txBody>
-          <a:bodyPr anchorCtr="0" anchor="t" bIns="176925" lIns="176925" spcFirstLastPara="1" rIns="176925" wrap="square" tIns="176925">
+          <a:bodyPr spcFirstLastPara="1" wrap="square" lIns="176925" tIns="176925" rIns="176925" bIns="176925" anchor="t" anchorCtr="0">
             <a:normAutofit/>
           </a:bodyPr>
           <a:lstStyle>
@@ -2826,15 +2898,19 @@
               <a:defRPr/>
             </a:lvl9pPr>
           </a:lstStyle>
-          <a:p/>
+          <a:p>
+            <a:endParaRPr/>
+          </a:p>
         </p:txBody>
       </p:sp>
       <p:sp>
         <p:nvSpPr>
           <p:cNvPr id="27" name="Google Shape;27;p6"/>
-          <p:cNvSpPr txBox="1"/>
+          <p:cNvSpPr txBox="1">
+            <a:spLocks noGrp="1"/>
+          </p:cNvSpPr>
           <p:nvPr>
-            <p:ph idx="12" type="sldNum"/>
+            <p:ph type="sldNum" idx="12"/>
           </p:nvPr>
         </p:nvSpPr>
         <p:spPr>
@@ -2847,7 +2923,7 @@
           </a:prstGeom>
         </p:spPr>
         <p:txBody>
-          <a:bodyPr anchorCtr="0" anchor="ctr" bIns="176925" lIns="176925" spcFirstLastPara="1" rIns="176925" wrap="square" tIns="176925">
+          <a:bodyPr spcFirstLastPara="1" wrap="square" lIns="176925" tIns="176925" rIns="176925" bIns="176925" anchor="ctr" anchorCtr="0">
             <a:normAutofit/>
           </a:bodyPr>
           <a:lstStyle>
@@ -2889,7 +2965,7 @@
             </a:lvl9pPr>
           </a:lstStyle>
           <a:p>
-            <a:pPr indent="0" lvl="0" marL="0" rtl="0" algn="r">
+            <a:pPr marL="0" lvl="0" indent="0" algn="r" rtl="0">
               <a:spcBef>
                 <a:spcPts val="0"/>
               </a:spcBef>
@@ -2915,11 +2991,11 @@
 </file>
 
 <file path=ppt/slideLayouts/slideLayout6.xml><?xml version="1.0" encoding="utf-8"?>
-<p:sldLayout xmlns:a="http://schemas.openxmlformats.org/drawingml/2006/main" xmlns:r="http://schemas.openxmlformats.org/officeDocument/2006/relationships" xmlns:mc="http://schemas.openxmlformats.org/markup-compatibility/2006" xmlns:mv="urn:schemas-microsoft-com:mac:vml" xmlns:p="http://schemas.openxmlformats.org/presentationml/2006/main" xmlns:c="http://schemas.openxmlformats.org/drawingml/2006/chart" xmlns:dgm="http://schemas.openxmlformats.org/drawingml/2006/diagram" xmlns:o="urn:schemas-microsoft-com:office:office" xmlns:v="urn:schemas-microsoft-com:vml" xmlns:pvml="urn:schemas-microsoft-com:office:powerpoint" xmlns:com="http://schemas.openxmlformats.org/drawingml/2006/compatibility" xmlns:p14="http://schemas.microsoft.com/office/powerpoint/2010/main" xmlns:p15="http://schemas.microsoft.com/office/powerpoint/2012/main" xmlns:ahyp="http://schemas.microsoft.com/office/drawing/2018/hyperlinkcolor" matchingName="One column text">
+<p:sldLayout xmlns:a="http://schemas.openxmlformats.org/drawingml/2006/main" xmlns:r="http://schemas.openxmlformats.org/officeDocument/2006/relationships" xmlns:p="http://schemas.openxmlformats.org/presentationml/2006/main" matchingName="One column text">
   <p:cSld name="ONE_COLUMN_TEXT">
     <p:spTree>
       <p:nvGrpSpPr>
-        <p:cNvPr id="28" name="Shape 28"/>
+        <p:cNvPr id="1" name="Shape 28"/>
         <p:cNvGrpSpPr/>
         <p:nvPr/>
       </p:nvGrpSpPr>
@@ -2934,7 +3010,9 @@
       <p:sp>
         <p:nvSpPr>
           <p:cNvPr id="29" name="Google Shape;29;p7"/>
-          <p:cNvSpPr txBox="1"/>
+          <p:cNvSpPr txBox="1">
+            <a:spLocks noGrp="1"/>
+          </p:cNvSpPr>
           <p:nvPr>
             <p:ph type="title"/>
           </p:nvPr>
@@ -2949,7 +3027,7 @@
           </a:prstGeom>
         </p:spPr>
         <p:txBody>
-          <a:bodyPr anchorCtr="0" anchor="b" bIns="176925" lIns="176925" spcFirstLastPara="1" rIns="176925" wrap="square" tIns="176925">
+          <a:bodyPr spcFirstLastPara="1" wrap="square" lIns="176925" tIns="176925" rIns="176925" bIns="176925" anchor="b" anchorCtr="0">
             <a:normAutofit/>
           </a:bodyPr>
           <a:lstStyle>
@@ -3053,15 +3131,19 @@
               <a:defRPr sz="4600"/>
             </a:lvl9pPr>
           </a:lstStyle>
-          <a:p/>
+          <a:p>
+            <a:endParaRPr/>
+          </a:p>
         </p:txBody>
       </p:sp>
       <p:sp>
         <p:nvSpPr>
           <p:cNvPr id="30" name="Google Shape;30;p7"/>
-          <p:cNvSpPr txBox="1"/>
+          <p:cNvSpPr txBox="1">
+            <a:spLocks noGrp="1"/>
+          </p:cNvSpPr>
           <p:nvPr>
-            <p:ph idx="1" type="body"/>
+            <p:ph type="body" idx="1"/>
           </p:nvPr>
         </p:nvSpPr>
         <p:spPr>
@@ -3074,11 +3156,11 @@
           </a:prstGeom>
         </p:spPr>
         <p:txBody>
-          <a:bodyPr anchorCtr="0" anchor="t" bIns="176925" lIns="176925" spcFirstLastPara="1" rIns="176925" wrap="square" tIns="176925">
+          <a:bodyPr spcFirstLastPara="1" wrap="square" lIns="176925" tIns="176925" rIns="176925" bIns="176925" anchor="t" anchorCtr="0">
             <a:normAutofit/>
           </a:bodyPr>
           <a:lstStyle>
-            <a:lvl1pPr indent="-374650" lvl="0" marL="457200">
+            <a:lvl1pPr marL="457200" lvl="0" indent="-374650">
               <a:spcBef>
                 <a:spcPts val="0"/>
               </a:spcBef>
@@ -3089,7 +3171,7 @@
               <a:buChar char="●"/>
               <a:defRPr sz="2300"/>
             </a:lvl1pPr>
-            <a:lvl2pPr indent="-374650" lvl="1" marL="914400">
+            <a:lvl2pPr marL="914400" lvl="1" indent="-374650">
               <a:spcBef>
                 <a:spcPts val="0"/>
               </a:spcBef>
@@ -3100,7 +3182,7 @@
               <a:buChar char="○"/>
               <a:defRPr sz="2300"/>
             </a:lvl2pPr>
-            <a:lvl3pPr indent="-374650" lvl="2" marL="1371600">
+            <a:lvl3pPr marL="1371600" lvl="2" indent="-374650">
               <a:spcBef>
                 <a:spcPts val="0"/>
               </a:spcBef>
@@ -3111,7 +3193,7 @@
               <a:buChar char="■"/>
               <a:defRPr sz="2300"/>
             </a:lvl3pPr>
-            <a:lvl4pPr indent="-374650" lvl="3" marL="1828800">
+            <a:lvl4pPr marL="1828800" lvl="3" indent="-374650">
               <a:spcBef>
                 <a:spcPts val="0"/>
               </a:spcBef>
@@ -3122,7 +3204,7 @@
               <a:buChar char="●"/>
               <a:defRPr sz="2300"/>
             </a:lvl4pPr>
-            <a:lvl5pPr indent="-374650" lvl="4" marL="2286000">
+            <a:lvl5pPr marL="2286000" lvl="4" indent="-374650">
               <a:spcBef>
                 <a:spcPts val="0"/>
               </a:spcBef>
@@ -3133,7 +3215,7 @@
               <a:buChar char="○"/>
               <a:defRPr sz="2300"/>
             </a:lvl5pPr>
-            <a:lvl6pPr indent="-374650" lvl="5" marL="2743200">
+            <a:lvl6pPr marL="2743200" lvl="5" indent="-374650">
               <a:spcBef>
                 <a:spcPts val="0"/>
               </a:spcBef>
@@ -3144,7 +3226,7 @@
               <a:buChar char="■"/>
               <a:defRPr sz="2300"/>
             </a:lvl6pPr>
-            <a:lvl7pPr indent="-374650" lvl="6" marL="3200400">
+            <a:lvl7pPr marL="3200400" lvl="6" indent="-374650">
               <a:spcBef>
                 <a:spcPts val="0"/>
               </a:spcBef>
@@ -3155,7 +3237,7 @@
               <a:buChar char="●"/>
               <a:defRPr sz="2300"/>
             </a:lvl7pPr>
-            <a:lvl8pPr indent="-374650" lvl="7" marL="3657600">
+            <a:lvl8pPr marL="3657600" lvl="7" indent="-374650">
               <a:spcBef>
                 <a:spcPts val="0"/>
               </a:spcBef>
@@ -3166,7 +3248,7 @@
               <a:buChar char="○"/>
               <a:defRPr sz="2300"/>
             </a:lvl8pPr>
-            <a:lvl9pPr indent="-374650" lvl="8" marL="4114800">
+            <a:lvl9pPr marL="4114800" lvl="8" indent="-374650">
               <a:spcBef>
                 <a:spcPts val="0"/>
               </a:spcBef>
@@ -3178,15 +3260,19 @@
               <a:defRPr sz="2300"/>
             </a:lvl9pPr>
           </a:lstStyle>
-          <a:p/>
+          <a:p>
+            <a:endParaRPr/>
+          </a:p>
         </p:txBody>
       </p:sp>
       <p:sp>
         <p:nvSpPr>
           <p:cNvPr id="31" name="Google Shape;31;p7"/>
-          <p:cNvSpPr txBox="1"/>
+          <p:cNvSpPr txBox="1">
+            <a:spLocks noGrp="1"/>
+          </p:cNvSpPr>
           <p:nvPr>
-            <p:ph idx="12" type="sldNum"/>
+            <p:ph type="sldNum" idx="12"/>
           </p:nvPr>
         </p:nvSpPr>
         <p:spPr>
@@ -3199,7 +3285,7 @@
           </a:prstGeom>
         </p:spPr>
         <p:txBody>
-          <a:bodyPr anchorCtr="0" anchor="ctr" bIns="176925" lIns="176925" spcFirstLastPara="1" rIns="176925" wrap="square" tIns="176925">
+          <a:bodyPr spcFirstLastPara="1" wrap="square" lIns="176925" tIns="176925" rIns="176925" bIns="176925" anchor="ctr" anchorCtr="0">
             <a:normAutofit/>
           </a:bodyPr>
           <a:lstStyle>
@@ -3241,7 +3327,7 @@
             </a:lvl9pPr>
           </a:lstStyle>
           <a:p>
-            <a:pPr indent="0" lvl="0" marL="0" rtl="0" algn="r">
+            <a:pPr marL="0" lvl="0" indent="0" algn="r" rtl="0">
               <a:spcBef>
                 <a:spcPts val="0"/>
               </a:spcBef>
@@ -3267,11 +3353,11 @@
 </file>
 
 <file path=ppt/slideLayouts/slideLayout7.xml><?xml version="1.0" encoding="utf-8"?>
-<p:sldLayout xmlns:a="http://schemas.openxmlformats.org/drawingml/2006/main" xmlns:r="http://schemas.openxmlformats.org/officeDocument/2006/relationships" xmlns:mc="http://schemas.openxmlformats.org/markup-compatibility/2006" xmlns:mv="urn:schemas-microsoft-com:mac:vml" xmlns:p="http://schemas.openxmlformats.org/presentationml/2006/main" xmlns:c="http://schemas.openxmlformats.org/drawingml/2006/chart" xmlns:dgm="http://schemas.openxmlformats.org/drawingml/2006/diagram" xmlns:o="urn:schemas-microsoft-com:office:office" xmlns:v="urn:schemas-microsoft-com:vml" xmlns:pvml="urn:schemas-microsoft-com:office:powerpoint" xmlns:com="http://schemas.openxmlformats.org/drawingml/2006/compatibility" xmlns:p14="http://schemas.microsoft.com/office/powerpoint/2010/main" xmlns:p15="http://schemas.microsoft.com/office/powerpoint/2012/main" xmlns:ahyp="http://schemas.microsoft.com/office/drawing/2018/hyperlinkcolor" matchingName="Main point">
+<p:sldLayout xmlns:a="http://schemas.openxmlformats.org/drawingml/2006/main" xmlns:r="http://schemas.openxmlformats.org/officeDocument/2006/relationships" xmlns:p="http://schemas.openxmlformats.org/presentationml/2006/main" matchingName="Main point">
   <p:cSld name="MAIN_POINT">
     <p:spTree>
       <p:nvGrpSpPr>
-        <p:cNvPr id="32" name="Shape 32"/>
+        <p:cNvPr id="1" name="Shape 32"/>
         <p:cNvGrpSpPr/>
         <p:nvPr/>
       </p:nvGrpSpPr>
@@ -3286,7 +3372,9 @@
       <p:sp>
         <p:nvSpPr>
           <p:cNvPr id="33" name="Google Shape;33;p8"/>
-          <p:cNvSpPr txBox="1"/>
+          <p:cNvSpPr txBox="1">
+            <a:spLocks noGrp="1"/>
+          </p:cNvSpPr>
           <p:nvPr>
             <p:ph type="title"/>
           </p:nvPr>
@@ -3301,7 +3389,7 @@
           </a:prstGeom>
         </p:spPr>
         <p:txBody>
-          <a:bodyPr anchorCtr="0" anchor="ctr" bIns="176925" lIns="176925" spcFirstLastPara="1" rIns="176925" wrap="square" tIns="176925">
+          <a:bodyPr spcFirstLastPara="1" wrap="square" lIns="176925" tIns="176925" rIns="176925" bIns="176925" anchor="ctr" anchorCtr="0">
             <a:normAutofit/>
           </a:bodyPr>
           <a:lstStyle>
@@ -3405,15 +3493,19 @@
               <a:defRPr sz="9300"/>
             </a:lvl9pPr>
           </a:lstStyle>
-          <a:p/>
+          <a:p>
+            <a:endParaRPr/>
+          </a:p>
         </p:txBody>
       </p:sp>
       <p:sp>
         <p:nvSpPr>
           <p:cNvPr id="34" name="Google Shape;34;p8"/>
-          <p:cNvSpPr txBox="1"/>
+          <p:cNvSpPr txBox="1">
+            <a:spLocks noGrp="1"/>
+          </p:cNvSpPr>
           <p:nvPr>
-            <p:ph idx="12" type="sldNum"/>
+            <p:ph type="sldNum" idx="12"/>
           </p:nvPr>
         </p:nvSpPr>
         <p:spPr>
@@ -3426,7 +3518,7 @@
           </a:prstGeom>
         </p:spPr>
         <p:txBody>
-          <a:bodyPr anchorCtr="0" anchor="ctr" bIns="176925" lIns="176925" spcFirstLastPara="1" rIns="176925" wrap="square" tIns="176925">
+          <a:bodyPr spcFirstLastPara="1" wrap="square" lIns="176925" tIns="176925" rIns="176925" bIns="176925" anchor="ctr" anchorCtr="0">
             <a:normAutofit/>
           </a:bodyPr>
           <a:lstStyle>
@@ -3468,7 +3560,7 @@
             </a:lvl9pPr>
           </a:lstStyle>
           <a:p>
-            <a:pPr indent="0" lvl="0" marL="0" rtl="0" algn="r">
+            <a:pPr marL="0" lvl="0" indent="0" algn="r" rtl="0">
               <a:spcBef>
                 <a:spcPts val="0"/>
               </a:spcBef>
@@ -3494,11 +3586,11 @@
 </file>
 
 <file path=ppt/slideLayouts/slideLayout8.xml><?xml version="1.0" encoding="utf-8"?>
-<p:sldLayout xmlns:a="http://schemas.openxmlformats.org/drawingml/2006/main" xmlns:r="http://schemas.openxmlformats.org/officeDocument/2006/relationships" xmlns:mc="http://schemas.openxmlformats.org/markup-compatibility/2006" xmlns:mv="urn:schemas-microsoft-com:mac:vml" xmlns:p="http://schemas.openxmlformats.org/presentationml/2006/main" xmlns:c="http://schemas.openxmlformats.org/drawingml/2006/chart" xmlns:dgm="http://schemas.openxmlformats.org/drawingml/2006/diagram" xmlns:o="urn:schemas-microsoft-com:office:office" xmlns:v="urn:schemas-microsoft-com:vml" xmlns:pvml="urn:schemas-microsoft-com:office:powerpoint" xmlns:com="http://schemas.openxmlformats.org/drawingml/2006/compatibility" xmlns:p14="http://schemas.microsoft.com/office/powerpoint/2010/main" xmlns:p15="http://schemas.microsoft.com/office/powerpoint/2012/main" xmlns:ahyp="http://schemas.microsoft.com/office/drawing/2018/hyperlinkcolor" matchingName="Section title and description">
+<p:sldLayout xmlns:a="http://schemas.openxmlformats.org/drawingml/2006/main" xmlns:r="http://schemas.openxmlformats.org/officeDocument/2006/relationships" xmlns:p="http://schemas.openxmlformats.org/presentationml/2006/main" matchingName="Section title and description">
   <p:cSld name="SECTION_TITLE_AND_DESCRIPTION">
     <p:spTree>
       <p:nvGrpSpPr>
-        <p:cNvPr id="35" name="Shape 35"/>
+        <p:cNvPr id="1" name="Shape 35"/>
         <p:cNvGrpSpPr/>
         <p:nvPr/>
       </p:nvGrpSpPr>
@@ -3532,12 +3624,12 @@
           </a:ln>
         </p:spPr>
         <p:txBody>
-          <a:bodyPr anchorCtr="0" anchor="ctr" bIns="176925" lIns="176925" spcFirstLastPara="1" rIns="176925" wrap="square" tIns="176925">
+          <a:bodyPr spcFirstLastPara="1" wrap="square" lIns="176925" tIns="176925" rIns="176925" bIns="176925" anchor="ctr" anchorCtr="0">
             <a:noAutofit/>
           </a:bodyPr>
           <a:lstStyle/>
           <a:p>
-            <a:pPr indent="0" lvl="0" marL="0" rtl="0" algn="l">
+            <a:pPr marL="0" lvl="0" indent="0" algn="l" rtl="0">
               <a:spcBef>
                 <a:spcPts val="0"/>
               </a:spcBef>
@@ -3546,9 +3638,6 @@
               </a:spcAft>
               <a:buNone/>
             </a:pPr>
-            <a:r>
-              <a:t/>
-            </a:r>
             <a:endParaRPr/>
           </a:p>
         </p:txBody>
@@ -3556,7 +3645,9 @@
       <p:sp>
         <p:nvSpPr>
           <p:cNvPr id="37" name="Google Shape;37;p9"/>
-          <p:cNvSpPr txBox="1"/>
+          <p:cNvSpPr txBox="1">
+            <a:spLocks noGrp="1"/>
+          </p:cNvSpPr>
           <p:nvPr>
             <p:ph type="title"/>
           </p:nvPr>
@@ -3571,7 +3662,7 @@
           </a:prstGeom>
         </p:spPr>
         <p:txBody>
-          <a:bodyPr anchorCtr="0" anchor="b" bIns="176925" lIns="176925" spcFirstLastPara="1" rIns="176925" wrap="square" tIns="176925">
+          <a:bodyPr spcFirstLastPara="1" wrap="square" lIns="176925" tIns="176925" rIns="176925" bIns="176925" anchor="b" anchorCtr="0">
             <a:normAutofit/>
           </a:bodyPr>
           <a:lstStyle>
@@ -3675,15 +3766,19 @@
               <a:defRPr sz="8100"/>
             </a:lvl9pPr>
           </a:lstStyle>
-          <a:p/>
+          <a:p>
+            <a:endParaRPr/>
+          </a:p>
         </p:txBody>
       </p:sp>
       <p:sp>
         <p:nvSpPr>
           <p:cNvPr id="38" name="Google Shape;38;p9"/>
-          <p:cNvSpPr txBox="1"/>
+          <p:cNvSpPr txBox="1">
+            <a:spLocks noGrp="1"/>
+          </p:cNvSpPr>
           <p:nvPr>
-            <p:ph idx="1" type="subTitle"/>
+            <p:ph type="subTitle" idx="1"/>
           </p:nvPr>
         </p:nvSpPr>
         <p:spPr>
@@ -3696,7 +3791,7 @@
           </a:prstGeom>
         </p:spPr>
         <p:txBody>
-          <a:bodyPr anchorCtr="0" anchor="t" bIns="176925" lIns="176925" spcFirstLastPara="1" rIns="176925" wrap="square" tIns="176925">
+          <a:bodyPr spcFirstLastPara="1" wrap="square" lIns="176925" tIns="176925" rIns="176925" bIns="176925" anchor="t" anchorCtr="0">
             <a:normAutofit/>
           </a:bodyPr>
           <a:lstStyle>
@@ -3827,15 +3922,19 @@
               <a:defRPr sz="4100"/>
             </a:lvl9pPr>
           </a:lstStyle>
-          <a:p/>
+          <a:p>
+            <a:endParaRPr/>
+          </a:p>
         </p:txBody>
       </p:sp>
       <p:sp>
         <p:nvSpPr>
           <p:cNvPr id="39" name="Google Shape;39;p9"/>
-          <p:cNvSpPr txBox="1"/>
+          <p:cNvSpPr txBox="1">
+            <a:spLocks noGrp="1"/>
+          </p:cNvSpPr>
           <p:nvPr>
-            <p:ph idx="2" type="body"/>
+            <p:ph type="body" idx="2"/>
           </p:nvPr>
         </p:nvSpPr>
         <p:spPr>
@@ -3848,11 +3947,11 @@
           </a:prstGeom>
         </p:spPr>
         <p:txBody>
-          <a:bodyPr anchorCtr="0" anchor="ctr" bIns="176925" lIns="176925" spcFirstLastPara="1" rIns="176925" wrap="square" tIns="176925">
+          <a:bodyPr spcFirstLastPara="1" wrap="square" lIns="176925" tIns="176925" rIns="176925" bIns="176925" anchor="ctr" anchorCtr="0">
             <a:normAutofit/>
           </a:bodyPr>
           <a:lstStyle>
-            <a:lvl1pPr indent="-450850" lvl="0" marL="457200">
+            <a:lvl1pPr marL="457200" lvl="0" indent="-450850">
               <a:spcBef>
                 <a:spcPts val="0"/>
               </a:spcBef>
@@ -3863,7 +3962,7 @@
               <a:buChar char="●"/>
               <a:defRPr/>
             </a:lvl1pPr>
-            <a:lvl2pPr indent="-400050" lvl="1" marL="914400">
+            <a:lvl2pPr marL="914400" lvl="1" indent="-400050">
               <a:spcBef>
                 <a:spcPts val="0"/>
               </a:spcBef>
@@ -3874,7 +3973,7 @@
               <a:buChar char="○"/>
               <a:defRPr/>
             </a:lvl2pPr>
-            <a:lvl3pPr indent="-400050" lvl="2" marL="1371600">
+            <a:lvl3pPr marL="1371600" lvl="2" indent="-400050">
               <a:spcBef>
                 <a:spcPts val="0"/>
               </a:spcBef>
@@ -3885,7 +3984,7 @@
               <a:buChar char="■"/>
               <a:defRPr/>
             </a:lvl3pPr>
-            <a:lvl4pPr indent="-400050" lvl="3" marL="1828800">
+            <a:lvl4pPr marL="1828800" lvl="3" indent="-400050">
               <a:spcBef>
                 <a:spcPts val="0"/>
               </a:spcBef>
@@ -3896,7 +3995,7 @@
               <a:buChar char="●"/>
               <a:defRPr/>
             </a:lvl4pPr>
-            <a:lvl5pPr indent="-400050" lvl="4" marL="2286000">
+            <a:lvl5pPr marL="2286000" lvl="4" indent="-400050">
               <a:spcBef>
                 <a:spcPts val="0"/>
               </a:spcBef>
@@ -3907,7 +4006,7 @@
               <a:buChar char="○"/>
               <a:defRPr/>
             </a:lvl5pPr>
-            <a:lvl6pPr indent="-400050" lvl="5" marL="2743200">
+            <a:lvl6pPr marL="2743200" lvl="5" indent="-400050">
               <a:spcBef>
                 <a:spcPts val="0"/>
               </a:spcBef>
@@ -3918,7 +4017,7 @@
               <a:buChar char="■"/>
               <a:defRPr/>
             </a:lvl6pPr>
-            <a:lvl7pPr indent="-400050" lvl="6" marL="3200400">
+            <a:lvl7pPr marL="3200400" lvl="6" indent="-400050">
               <a:spcBef>
                 <a:spcPts val="0"/>
               </a:spcBef>
@@ -3929,7 +4028,7 @@
               <a:buChar char="●"/>
               <a:defRPr/>
             </a:lvl7pPr>
-            <a:lvl8pPr indent="-400050" lvl="7" marL="3657600">
+            <a:lvl8pPr marL="3657600" lvl="7" indent="-400050">
               <a:spcBef>
                 <a:spcPts val="0"/>
               </a:spcBef>
@@ -3940,7 +4039,7 @@
               <a:buChar char="○"/>
               <a:defRPr/>
             </a:lvl8pPr>
-            <a:lvl9pPr indent="-400050" lvl="8" marL="4114800">
+            <a:lvl9pPr marL="4114800" lvl="8" indent="-400050">
               <a:spcBef>
                 <a:spcPts val="0"/>
               </a:spcBef>
@@ -3952,15 +4051,19 @@
               <a:defRPr/>
             </a:lvl9pPr>
           </a:lstStyle>
-          <a:p/>
+          <a:p>
+            <a:endParaRPr/>
+          </a:p>
         </p:txBody>
       </p:sp>
       <p:sp>
         <p:nvSpPr>
           <p:cNvPr id="40" name="Google Shape;40;p9"/>
-          <p:cNvSpPr txBox="1"/>
+          <p:cNvSpPr txBox="1">
+            <a:spLocks noGrp="1"/>
+          </p:cNvSpPr>
           <p:nvPr>
-            <p:ph idx="12" type="sldNum"/>
+            <p:ph type="sldNum" idx="12"/>
           </p:nvPr>
         </p:nvSpPr>
         <p:spPr>
@@ -3973,7 +4076,7 @@
           </a:prstGeom>
         </p:spPr>
         <p:txBody>
-          <a:bodyPr anchorCtr="0" anchor="ctr" bIns="176925" lIns="176925" spcFirstLastPara="1" rIns="176925" wrap="square" tIns="176925">
+          <a:bodyPr spcFirstLastPara="1" wrap="square" lIns="176925" tIns="176925" rIns="176925" bIns="176925" anchor="ctr" anchorCtr="0">
             <a:normAutofit/>
           </a:bodyPr>
           <a:lstStyle>
@@ -4015,7 +4118,7 @@
             </a:lvl9pPr>
           </a:lstStyle>
           <a:p>
-            <a:pPr indent="0" lvl="0" marL="0" rtl="0" algn="r">
+            <a:pPr marL="0" lvl="0" indent="0" algn="r" rtl="0">
               <a:spcBef>
                 <a:spcPts val="0"/>
               </a:spcBef>
@@ -4041,11 +4144,11 @@
 </file>
 
 <file path=ppt/slideLayouts/slideLayout9.xml><?xml version="1.0" encoding="utf-8"?>
-<p:sldLayout xmlns:a="http://schemas.openxmlformats.org/drawingml/2006/main" xmlns:r="http://schemas.openxmlformats.org/officeDocument/2006/relationships" xmlns:mc="http://schemas.openxmlformats.org/markup-compatibility/2006" xmlns:mv="urn:schemas-microsoft-com:mac:vml" xmlns:p="http://schemas.openxmlformats.org/presentationml/2006/main" xmlns:c="http://schemas.openxmlformats.org/drawingml/2006/chart" xmlns:dgm="http://schemas.openxmlformats.org/drawingml/2006/diagram" xmlns:o="urn:schemas-microsoft-com:office:office" xmlns:v="urn:schemas-microsoft-com:vml" xmlns:pvml="urn:schemas-microsoft-com:office:powerpoint" xmlns:com="http://schemas.openxmlformats.org/drawingml/2006/compatibility" xmlns:p14="http://schemas.microsoft.com/office/powerpoint/2010/main" xmlns:p15="http://schemas.microsoft.com/office/powerpoint/2012/main" xmlns:ahyp="http://schemas.microsoft.com/office/drawing/2018/hyperlinkcolor" matchingName="Caption">
+<p:sldLayout xmlns:a="http://schemas.openxmlformats.org/drawingml/2006/main" xmlns:r="http://schemas.openxmlformats.org/officeDocument/2006/relationships" xmlns:p="http://schemas.openxmlformats.org/presentationml/2006/main" matchingName="Caption">
   <p:cSld name="CAPTION_ONLY">
     <p:spTree>
       <p:nvGrpSpPr>
-        <p:cNvPr id="41" name="Shape 41"/>
+        <p:cNvPr id="1" name="Shape 41"/>
         <p:cNvGrpSpPr/>
         <p:nvPr/>
       </p:nvGrpSpPr>
@@ -4060,9 +4163,11 @@
       <p:sp>
         <p:nvSpPr>
           <p:cNvPr id="42" name="Google Shape;42;p10"/>
-          <p:cNvSpPr txBox="1"/>
+          <p:cNvSpPr txBox="1">
+            <a:spLocks noGrp="1"/>
+          </p:cNvSpPr>
           <p:nvPr>
-            <p:ph idx="1" type="body"/>
+            <p:ph type="body" idx="1"/>
           </p:nvPr>
         </p:nvSpPr>
         <p:spPr>
@@ -4075,11 +4180,11 @@
           </a:prstGeom>
         </p:spPr>
         <p:txBody>
-          <a:bodyPr anchorCtr="0" anchor="ctr" bIns="176925" lIns="176925" spcFirstLastPara="1" rIns="176925" wrap="square" tIns="176925">
+          <a:bodyPr spcFirstLastPara="1" wrap="square" lIns="176925" tIns="176925" rIns="176925" bIns="176925" anchor="ctr" anchorCtr="0">
             <a:normAutofit/>
           </a:bodyPr>
           <a:lstStyle>
-            <a:lvl1pPr indent="-228600" lvl="0" marL="457200">
+            <a:lvl1pPr marL="457200" lvl="0" indent="-228600">
               <a:lnSpc>
                 <a:spcPct val="100000"/>
               </a:lnSpc>
@@ -4094,15 +4199,19 @@
               <a:defRPr/>
             </a:lvl1pPr>
           </a:lstStyle>
-          <a:p/>
+          <a:p>
+            <a:endParaRPr/>
+          </a:p>
         </p:txBody>
       </p:sp>
       <p:sp>
         <p:nvSpPr>
           <p:cNvPr id="43" name="Google Shape;43;p10"/>
-          <p:cNvSpPr txBox="1"/>
+          <p:cNvSpPr txBox="1">
+            <a:spLocks noGrp="1"/>
+          </p:cNvSpPr>
           <p:nvPr>
-            <p:ph idx="12" type="sldNum"/>
+            <p:ph type="sldNum" idx="12"/>
           </p:nvPr>
         </p:nvSpPr>
         <p:spPr>
@@ -4115,7 +4224,7 @@
           </a:prstGeom>
         </p:spPr>
         <p:txBody>
-          <a:bodyPr anchorCtr="0" anchor="ctr" bIns="176925" lIns="176925" spcFirstLastPara="1" rIns="176925" wrap="square" tIns="176925">
+          <a:bodyPr spcFirstLastPara="1" wrap="square" lIns="176925" tIns="176925" rIns="176925" bIns="176925" anchor="ctr" anchorCtr="0">
             <a:normAutofit/>
           </a:bodyPr>
           <a:lstStyle>
@@ -4157,7 +4266,7 @@
             </a:lvl9pPr>
           </a:lstStyle>
           <a:p>
-            <a:pPr indent="0" lvl="0" marL="0" rtl="0" algn="r">
+            <a:pPr marL="0" lvl="0" indent="0" algn="r" rtl="0">
               <a:spcBef>
                 <a:spcPts val="0"/>
               </a:spcBef>
@@ -4183,18 +4292,19 @@
 </file>
 
 <file path=ppt/slideMasters/slideMaster1.xml><?xml version="1.0" encoding="utf-8"?>
-<p:sldMaster xmlns:a="http://schemas.openxmlformats.org/drawingml/2006/main" xmlns:r="http://schemas.openxmlformats.org/officeDocument/2006/relationships" xmlns:mc="http://schemas.openxmlformats.org/markup-compatibility/2006" xmlns:mv="urn:schemas-microsoft-com:mac:vml" xmlns:p="http://schemas.openxmlformats.org/presentationml/2006/main" xmlns:c="http://schemas.openxmlformats.org/drawingml/2006/chart" xmlns:dgm="http://schemas.openxmlformats.org/drawingml/2006/diagram" xmlns:o="urn:schemas-microsoft-com:office:office" xmlns:v="urn:schemas-microsoft-com:vml" xmlns:pvml="urn:schemas-microsoft-com:office:powerpoint" xmlns:com="http://schemas.openxmlformats.org/drawingml/2006/compatibility" xmlns:p14="http://schemas.microsoft.com/office/powerpoint/2010/main" xmlns:p15="http://schemas.microsoft.com/office/powerpoint/2012/main" xmlns:ahyp="http://schemas.microsoft.com/office/drawing/2018/hyperlinkcolor">
+<p:sldMaster xmlns:a="http://schemas.openxmlformats.org/drawingml/2006/main" xmlns:r="http://schemas.openxmlformats.org/officeDocument/2006/relationships" xmlns:p="http://schemas.openxmlformats.org/presentationml/2006/main">
   <p:cSld name="simple-light-2">
     <p:bg>
       <p:bgPr>
         <a:solidFill>
           <a:schemeClr val="lt1"/>
         </a:solidFill>
+        <a:effectLst/>
       </p:bgPr>
     </p:bg>
     <p:spTree>
       <p:nvGrpSpPr>
-        <p:cNvPr id="5" name="Shape 5"/>
+        <p:cNvPr id="1" name="Shape 5"/>
         <p:cNvGrpSpPr/>
         <p:nvPr/>
       </p:nvGrpSpPr>
@@ -4209,7 +4319,9 @@
       <p:sp>
         <p:nvSpPr>
           <p:cNvPr id="6" name="Google Shape;6;p1"/>
-          <p:cNvSpPr txBox="1"/>
+          <p:cNvSpPr txBox="1">
+            <a:spLocks noGrp="1"/>
+          </p:cNvSpPr>
           <p:nvPr>
             <p:ph type="title"/>
           </p:nvPr>
@@ -4228,7 +4340,7 @@
           </a:ln>
         </p:spPr>
         <p:txBody>
-          <a:bodyPr anchorCtr="0" anchor="t" bIns="176925" lIns="176925" spcFirstLastPara="1" rIns="176925" wrap="square" tIns="176925">
+          <a:bodyPr spcFirstLastPara="1" wrap="square" lIns="176925" tIns="176925" rIns="176925" bIns="176925" anchor="t" anchorCtr="0">
             <a:normAutofit/>
           </a:bodyPr>
           <a:lstStyle>
@@ -4395,15 +4507,19 @@
               </a:defRPr>
             </a:lvl9pPr>
           </a:lstStyle>
-          <a:p/>
+          <a:p>
+            <a:endParaRPr/>
+          </a:p>
         </p:txBody>
       </p:sp>
       <p:sp>
         <p:nvSpPr>
           <p:cNvPr id="7" name="Google Shape;7;p1"/>
-          <p:cNvSpPr txBox="1"/>
+          <p:cNvSpPr txBox="1">
+            <a:spLocks noGrp="1"/>
+          </p:cNvSpPr>
           <p:nvPr>
-            <p:ph idx="1" type="body"/>
+            <p:ph type="body" idx="1"/>
           </p:nvPr>
         </p:nvSpPr>
         <p:spPr>
@@ -4420,11 +4536,11 @@
           </a:ln>
         </p:spPr>
         <p:txBody>
-          <a:bodyPr anchorCtr="0" anchor="t" bIns="176925" lIns="176925" spcFirstLastPara="1" rIns="176925" wrap="square" tIns="176925">
+          <a:bodyPr spcFirstLastPara="1" wrap="square" lIns="176925" tIns="176925" rIns="176925" bIns="176925" anchor="t" anchorCtr="0">
             <a:normAutofit/>
           </a:bodyPr>
           <a:lstStyle>
-            <a:lvl1pPr indent="-450850" lvl="0" marL="457200">
+            <a:lvl1pPr marL="457200" lvl="0" indent="-450850">
               <a:lnSpc>
                 <a:spcPct val="115000"/>
               </a:lnSpc>
@@ -4445,7 +4561,7 @@
                 </a:solidFill>
               </a:defRPr>
             </a:lvl1pPr>
-            <a:lvl2pPr indent="-400050" lvl="1" marL="914400">
+            <a:lvl2pPr marL="914400" lvl="1" indent="-400050">
               <a:lnSpc>
                 <a:spcPct val="115000"/>
               </a:lnSpc>
@@ -4466,7 +4582,7 @@
                 </a:solidFill>
               </a:defRPr>
             </a:lvl2pPr>
-            <a:lvl3pPr indent="-400050" lvl="2" marL="1371600">
+            <a:lvl3pPr marL="1371600" lvl="2" indent="-400050">
               <a:lnSpc>
                 <a:spcPct val="115000"/>
               </a:lnSpc>
@@ -4487,7 +4603,7 @@
                 </a:solidFill>
               </a:defRPr>
             </a:lvl3pPr>
-            <a:lvl4pPr indent="-400050" lvl="3" marL="1828800">
+            <a:lvl4pPr marL="1828800" lvl="3" indent="-400050">
               <a:lnSpc>
                 <a:spcPct val="115000"/>
               </a:lnSpc>
@@ -4508,7 +4624,7 @@
                 </a:solidFill>
               </a:defRPr>
             </a:lvl4pPr>
-            <a:lvl5pPr indent="-400050" lvl="4" marL="2286000">
+            <a:lvl5pPr marL="2286000" lvl="4" indent="-400050">
               <a:lnSpc>
                 <a:spcPct val="115000"/>
               </a:lnSpc>
@@ -4529,7 +4645,7 @@
                 </a:solidFill>
               </a:defRPr>
             </a:lvl5pPr>
-            <a:lvl6pPr indent="-400050" lvl="5" marL="2743200">
+            <a:lvl6pPr marL="2743200" lvl="5" indent="-400050">
               <a:lnSpc>
                 <a:spcPct val="115000"/>
               </a:lnSpc>
@@ -4550,7 +4666,7 @@
                 </a:solidFill>
               </a:defRPr>
             </a:lvl6pPr>
-            <a:lvl7pPr indent="-400050" lvl="6" marL="3200400">
+            <a:lvl7pPr marL="3200400" lvl="6" indent="-400050">
               <a:lnSpc>
                 <a:spcPct val="115000"/>
               </a:lnSpc>
@@ -4571,7 +4687,7 @@
                 </a:solidFill>
               </a:defRPr>
             </a:lvl7pPr>
-            <a:lvl8pPr indent="-400050" lvl="7" marL="3657600">
+            <a:lvl8pPr marL="3657600" lvl="7" indent="-400050">
               <a:lnSpc>
                 <a:spcPct val="115000"/>
               </a:lnSpc>
@@ -4592,7 +4708,7 @@
                 </a:solidFill>
               </a:defRPr>
             </a:lvl8pPr>
-            <a:lvl9pPr indent="-400050" lvl="8" marL="4114800">
+            <a:lvl9pPr marL="4114800" lvl="8" indent="-400050">
               <a:lnSpc>
                 <a:spcPct val="115000"/>
               </a:lnSpc>
@@ -4614,15 +4730,19 @@
               </a:defRPr>
             </a:lvl9pPr>
           </a:lstStyle>
-          <a:p/>
+          <a:p>
+            <a:endParaRPr/>
+          </a:p>
         </p:txBody>
       </p:sp>
       <p:sp>
         <p:nvSpPr>
           <p:cNvPr id="8" name="Google Shape;8;p1"/>
-          <p:cNvSpPr txBox="1"/>
+          <p:cNvSpPr txBox="1">
+            <a:spLocks noGrp="1"/>
+          </p:cNvSpPr>
           <p:nvPr>
-            <p:ph idx="12" type="sldNum"/>
+            <p:ph type="sldNum" idx="12"/>
           </p:nvPr>
         </p:nvSpPr>
         <p:spPr>
@@ -4639,7 +4759,7 @@
           </a:ln>
         </p:spPr>
         <p:txBody>
-          <a:bodyPr anchorCtr="0" anchor="ctr" bIns="176925" lIns="176925" spcFirstLastPara="1" rIns="176925" wrap="square" tIns="176925">
+          <a:bodyPr spcFirstLastPara="1" wrap="square" lIns="176925" tIns="176925" rIns="176925" bIns="176925" anchor="ctr" anchorCtr="0">
             <a:normAutofit/>
           </a:bodyPr>
           <a:lstStyle>
@@ -4717,7 +4837,7 @@
             </a:lvl9pPr>
           </a:lstStyle>
           <a:p>
-            <a:pPr indent="0" lvl="0" marL="0" rtl="0" algn="r">
+            <a:pPr marL="0" lvl="0" indent="0" algn="r" rtl="0">
               <a:spcBef>
                 <a:spcPts val="0"/>
               </a:spcBef>
@@ -4736,7 +4856,7 @@
       </p:sp>
     </p:spTree>
   </p:cSld>
-  <p:clrMap accent1="accent1" accent2="accent2" accent3="accent3" accent4="accent4" accent5="accent5" accent6="accent6" bg1="lt1" bg2="dk2" tx1="dk1" tx2="lt2" folHlink="folHlink" hlink="hlink"/>
+  <p:clrMap bg1="lt1" tx1="dk1" bg2="dk2" tx2="lt2" accent1="accent1" accent2="accent2" accent3="accent3" accent4="accent4" accent5="accent5" accent6="accent6" hlink="hlink" folHlink="folHlink"/>
   <p:sldLayoutIdLst>
     <p:sldLayoutId id="2147483648" r:id="rId1"/>
     <p:sldLayoutId id="2147483649" r:id="rId2"/>
@@ -4750,10 +4870,10 @@
     <p:sldLayoutId id="2147483657" r:id="rId10"/>
     <p:sldLayoutId id="2147483658" r:id="rId11"/>
   </p:sldLayoutIdLst>
-  <p:hf dt="0" ftr="0" hdr="0" sldNum="0"/>
+  <p:hf sldNum="0" hdr="0" ftr="0" dt="0"/>
   <p:txStyles>
     <p:titleStyle>
-      <a:defPPr lvl="0" marR="0" rtl="0" algn="l">
+      <a:defPPr marR="0" lvl="0" algn="l" rtl="0">
         <a:lnSpc>
           <a:spcPct val="100000"/>
         </a:lnSpc>
@@ -4764,7 +4884,7 @@
           <a:spcPts val="0"/>
         </a:spcAft>
       </a:defPPr>
-      <a:lvl1pPr lvl="0" marR="0" rtl="0" algn="l">
+      <a:lvl1pPr marR="0" lvl="0" algn="l" rtl="0">
         <a:lnSpc>
           <a:spcPct val="100000"/>
         </a:lnSpc>
@@ -4778,7 +4898,7 @@
           <a:srgbClr val="000000"/>
         </a:buClr>
         <a:buFont typeface="Arial"/>
-        <a:defRPr b="0" i="0" sz="1400" u="none" cap="none" strike="noStrike">
+        <a:defRPr sz="1400" b="0" i="0" u="none" strike="noStrike" cap="none">
           <a:solidFill>
             <a:srgbClr val="000000"/>
           </a:solidFill>
@@ -4788,7 +4908,7 @@
           <a:sym typeface="Arial"/>
         </a:defRPr>
       </a:lvl1pPr>
-      <a:lvl2pPr lvl="1" marR="0" rtl="0" algn="l">
+      <a:lvl2pPr marR="0" lvl="1" algn="l" rtl="0">
         <a:lnSpc>
           <a:spcPct val="100000"/>
         </a:lnSpc>
@@ -4802,7 +4922,7 @@
           <a:srgbClr val="000000"/>
         </a:buClr>
         <a:buFont typeface="Arial"/>
-        <a:defRPr b="0" i="0" sz="1400" u="none" cap="none" strike="noStrike">
+        <a:defRPr sz="1400" b="0" i="0" u="none" strike="noStrike" cap="none">
           <a:solidFill>
             <a:srgbClr val="000000"/>
           </a:solidFill>
@@ -4812,7 +4932,7 @@
           <a:sym typeface="Arial"/>
         </a:defRPr>
       </a:lvl2pPr>
-      <a:lvl3pPr lvl="2" marR="0" rtl="0" algn="l">
+      <a:lvl3pPr marR="0" lvl="2" algn="l" rtl="0">
         <a:lnSpc>
           <a:spcPct val="100000"/>
         </a:lnSpc>
@@ -4826,7 +4946,7 @@
           <a:srgbClr val="000000"/>
         </a:buClr>
         <a:buFont typeface="Arial"/>
-        <a:defRPr b="0" i="0" sz="1400" u="none" cap="none" strike="noStrike">
+        <a:defRPr sz="1400" b="0" i="0" u="none" strike="noStrike" cap="none">
           <a:solidFill>
             <a:srgbClr val="000000"/>
           </a:solidFill>
@@ -4836,7 +4956,7 @@
           <a:sym typeface="Arial"/>
         </a:defRPr>
       </a:lvl3pPr>
-      <a:lvl4pPr lvl="3" marR="0" rtl="0" algn="l">
+      <a:lvl4pPr marR="0" lvl="3" algn="l" rtl="0">
         <a:lnSpc>
           <a:spcPct val="100000"/>
         </a:lnSpc>
@@ -4850,7 +4970,7 @@
           <a:srgbClr val="000000"/>
         </a:buClr>
         <a:buFont typeface="Arial"/>
-        <a:defRPr b="0" i="0" sz="1400" u="none" cap="none" strike="noStrike">
+        <a:defRPr sz="1400" b="0" i="0" u="none" strike="noStrike" cap="none">
           <a:solidFill>
             <a:srgbClr val="000000"/>
           </a:solidFill>
@@ -4860,7 +4980,7 @@
           <a:sym typeface="Arial"/>
         </a:defRPr>
       </a:lvl4pPr>
-      <a:lvl5pPr lvl="4" marR="0" rtl="0" algn="l">
+      <a:lvl5pPr marR="0" lvl="4" algn="l" rtl="0">
         <a:lnSpc>
           <a:spcPct val="100000"/>
         </a:lnSpc>
@@ -4874,7 +4994,7 @@
           <a:srgbClr val="000000"/>
         </a:buClr>
         <a:buFont typeface="Arial"/>
-        <a:defRPr b="0" i="0" sz="1400" u="none" cap="none" strike="noStrike">
+        <a:defRPr sz="1400" b="0" i="0" u="none" strike="noStrike" cap="none">
           <a:solidFill>
             <a:srgbClr val="000000"/>
           </a:solidFill>
@@ -4884,7 +5004,7 @@
           <a:sym typeface="Arial"/>
         </a:defRPr>
       </a:lvl5pPr>
-      <a:lvl6pPr lvl="5" marR="0" rtl="0" algn="l">
+      <a:lvl6pPr marR="0" lvl="5" algn="l" rtl="0">
         <a:lnSpc>
           <a:spcPct val="100000"/>
         </a:lnSpc>
@@ -4898,7 +5018,7 @@
           <a:srgbClr val="000000"/>
         </a:buClr>
         <a:buFont typeface="Arial"/>
-        <a:defRPr b="0" i="0" sz="1400" u="none" cap="none" strike="noStrike">
+        <a:defRPr sz="1400" b="0" i="0" u="none" strike="noStrike" cap="none">
           <a:solidFill>
             <a:srgbClr val="000000"/>
           </a:solidFill>
@@ -4908,7 +5028,7 @@
           <a:sym typeface="Arial"/>
         </a:defRPr>
       </a:lvl6pPr>
-      <a:lvl7pPr lvl="6" marR="0" rtl="0" algn="l">
+      <a:lvl7pPr marR="0" lvl="6" algn="l" rtl="0">
         <a:lnSpc>
           <a:spcPct val="100000"/>
         </a:lnSpc>
@@ -4922,7 +5042,7 @@
           <a:srgbClr val="000000"/>
         </a:buClr>
         <a:buFont typeface="Arial"/>
-        <a:defRPr b="0" i="0" sz="1400" u="none" cap="none" strike="noStrike">
+        <a:defRPr sz="1400" b="0" i="0" u="none" strike="noStrike" cap="none">
           <a:solidFill>
             <a:srgbClr val="000000"/>
           </a:solidFill>
@@ -4932,7 +5052,7 @@
           <a:sym typeface="Arial"/>
         </a:defRPr>
       </a:lvl7pPr>
-      <a:lvl8pPr lvl="7" marR="0" rtl="0" algn="l">
+      <a:lvl8pPr marR="0" lvl="7" algn="l" rtl="0">
         <a:lnSpc>
           <a:spcPct val="100000"/>
         </a:lnSpc>
@@ -4946,7 +5066,7 @@
           <a:srgbClr val="000000"/>
         </a:buClr>
         <a:buFont typeface="Arial"/>
-        <a:defRPr b="0" i="0" sz="1400" u="none" cap="none" strike="noStrike">
+        <a:defRPr sz="1400" b="0" i="0" u="none" strike="noStrike" cap="none">
           <a:solidFill>
             <a:srgbClr val="000000"/>
           </a:solidFill>
@@ -4956,7 +5076,7 @@
           <a:sym typeface="Arial"/>
         </a:defRPr>
       </a:lvl8pPr>
-      <a:lvl9pPr lvl="8" marR="0" rtl="0" algn="l">
+      <a:lvl9pPr marR="0" lvl="8" algn="l" rtl="0">
         <a:lnSpc>
           <a:spcPct val="100000"/>
         </a:lnSpc>
@@ -4970,7 +5090,7 @@
           <a:srgbClr val="000000"/>
         </a:buClr>
         <a:buFont typeface="Arial"/>
-        <a:defRPr b="0" i="0" sz="1400" u="none" cap="none" strike="noStrike">
+        <a:defRPr sz="1400" b="0" i="0" u="none" strike="noStrike" cap="none">
           <a:solidFill>
             <a:srgbClr val="000000"/>
           </a:solidFill>
@@ -4982,7 +5102,7 @@
       </a:lvl9pPr>
     </p:titleStyle>
     <p:bodyStyle>
-      <a:defPPr lvl="0" marR="0" rtl="0" algn="l">
+      <a:defPPr marR="0" lvl="0" algn="l" rtl="0">
         <a:lnSpc>
           <a:spcPct val="100000"/>
         </a:lnSpc>
@@ -4993,7 +5113,7 @@
           <a:spcPts val="0"/>
         </a:spcAft>
       </a:defPPr>
-      <a:lvl1pPr lvl="0" marR="0" rtl="0" algn="l">
+      <a:lvl1pPr marR="0" lvl="0" algn="l" rtl="0">
         <a:lnSpc>
           <a:spcPct val="100000"/>
         </a:lnSpc>
@@ -5007,7 +5127,7 @@
           <a:srgbClr val="000000"/>
         </a:buClr>
         <a:buFont typeface="Arial"/>
-        <a:defRPr b="0" i="0" sz="1400" u="none" cap="none" strike="noStrike">
+        <a:defRPr sz="1400" b="0" i="0" u="none" strike="noStrike" cap="none">
           <a:solidFill>
             <a:srgbClr val="000000"/>
           </a:solidFill>
@@ -5017,7 +5137,7 @@
           <a:sym typeface="Arial"/>
         </a:defRPr>
       </a:lvl1pPr>
-      <a:lvl2pPr lvl="1" marR="0" rtl="0" algn="l">
+      <a:lvl2pPr marR="0" lvl="1" algn="l" rtl="0">
         <a:lnSpc>
           <a:spcPct val="100000"/>
         </a:lnSpc>
@@ -5031,7 +5151,7 @@
           <a:srgbClr val="000000"/>
         </a:buClr>
         <a:buFont typeface="Arial"/>
-        <a:defRPr b="0" i="0" sz="1400" u="none" cap="none" strike="noStrike">
+        <a:defRPr sz="1400" b="0" i="0" u="none" strike="noStrike" cap="none">
           <a:solidFill>
             <a:srgbClr val="000000"/>
           </a:solidFill>
@@ -5041,7 +5161,7 @@
           <a:sym typeface="Arial"/>
         </a:defRPr>
       </a:lvl2pPr>
-      <a:lvl3pPr lvl="2" marR="0" rtl="0" algn="l">
+      <a:lvl3pPr marR="0" lvl="2" algn="l" rtl="0">
         <a:lnSpc>
           <a:spcPct val="100000"/>
         </a:lnSpc>
@@ -5055,7 +5175,7 @@
           <a:srgbClr val="000000"/>
         </a:buClr>
         <a:buFont typeface="Arial"/>
-        <a:defRPr b="0" i="0" sz="1400" u="none" cap="none" strike="noStrike">
+        <a:defRPr sz="1400" b="0" i="0" u="none" strike="noStrike" cap="none">
           <a:solidFill>
             <a:srgbClr val="000000"/>
           </a:solidFill>
@@ -5065,7 +5185,7 @@
           <a:sym typeface="Arial"/>
         </a:defRPr>
       </a:lvl3pPr>
-      <a:lvl4pPr lvl="3" marR="0" rtl="0" algn="l">
+      <a:lvl4pPr marR="0" lvl="3" algn="l" rtl="0">
         <a:lnSpc>
           <a:spcPct val="100000"/>
         </a:lnSpc>
@@ -5079,7 +5199,7 @@
           <a:srgbClr val="000000"/>
         </a:buClr>
         <a:buFont typeface="Arial"/>
-        <a:defRPr b="0" i="0" sz="1400" u="none" cap="none" strike="noStrike">
+        <a:defRPr sz="1400" b="0" i="0" u="none" strike="noStrike" cap="none">
           <a:solidFill>
             <a:srgbClr val="000000"/>
           </a:solidFill>
@@ -5089,7 +5209,7 @@
           <a:sym typeface="Arial"/>
         </a:defRPr>
       </a:lvl4pPr>
-      <a:lvl5pPr lvl="4" marR="0" rtl="0" algn="l">
+      <a:lvl5pPr marR="0" lvl="4" algn="l" rtl="0">
         <a:lnSpc>
           <a:spcPct val="100000"/>
         </a:lnSpc>
@@ -5103,7 +5223,7 @@
           <a:srgbClr val="000000"/>
         </a:buClr>
         <a:buFont typeface="Arial"/>
-        <a:defRPr b="0" i="0" sz="1400" u="none" cap="none" strike="noStrike">
+        <a:defRPr sz="1400" b="0" i="0" u="none" strike="noStrike" cap="none">
           <a:solidFill>
             <a:srgbClr val="000000"/>
           </a:solidFill>
@@ -5113,7 +5233,7 @@
           <a:sym typeface="Arial"/>
         </a:defRPr>
       </a:lvl5pPr>
-      <a:lvl6pPr lvl="5" marR="0" rtl="0" algn="l">
+      <a:lvl6pPr marR="0" lvl="5" algn="l" rtl="0">
         <a:lnSpc>
           <a:spcPct val="100000"/>
         </a:lnSpc>
@@ -5127,7 +5247,7 @@
           <a:srgbClr val="000000"/>
         </a:buClr>
         <a:buFont typeface="Arial"/>
-        <a:defRPr b="0" i="0" sz="1400" u="none" cap="none" strike="noStrike">
+        <a:defRPr sz="1400" b="0" i="0" u="none" strike="noStrike" cap="none">
           <a:solidFill>
             <a:srgbClr val="000000"/>
           </a:solidFill>
@@ -5137,7 +5257,7 @@
           <a:sym typeface="Arial"/>
         </a:defRPr>
       </a:lvl6pPr>
-      <a:lvl7pPr lvl="6" marR="0" rtl="0" algn="l">
+      <a:lvl7pPr marR="0" lvl="6" algn="l" rtl="0">
         <a:lnSpc>
           <a:spcPct val="100000"/>
         </a:lnSpc>
@@ -5151,7 +5271,7 @@
           <a:srgbClr val="000000"/>
         </a:buClr>
         <a:buFont typeface="Arial"/>
-        <a:defRPr b="0" i="0" sz="1400" u="none" cap="none" strike="noStrike">
+        <a:defRPr sz="1400" b="0" i="0" u="none" strike="noStrike" cap="none">
           <a:solidFill>
             <a:srgbClr val="000000"/>
           </a:solidFill>
@@ -5161,7 +5281,7 @@
           <a:sym typeface="Arial"/>
         </a:defRPr>
       </a:lvl7pPr>
-      <a:lvl8pPr lvl="7" marR="0" rtl="0" algn="l">
+      <a:lvl8pPr marR="0" lvl="7" algn="l" rtl="0">
         <a:lnSpc>
           <a:spcPct val="100000"/>
         </a:lnSpc>
@@ -5175,7 +5295,7 @@
           <a:srgbClr val="000000"/>
         </a:buClr>
         <a:buFont typeface="Arial"/>
-        <a:defRPr b="0" i="0" sz="1400" u="none" cap="none" strike="noStrike">
+        <a:defRPr sz="1400" b="0" i="0" u="none" strike="noStrike" cap="none">
           <a:solidFill>
             <a:srgbClr val="000000"/>
           </a:solidFill>
@@ -5185,7 +5305,7 @@
           <a:sym typeface="Arial"/>
         </a:defRPr>
       </a:lvl8pPr>
-      <a:lvl9pPr lvl="8" marR="0" rtl="0" algn="l">
+      <a:lvl9pPr marR="0" lvl="8" algn="l" rtl="0">
         <a:lnSpc>
           <a:spcPct val="100000"/>
         </a:lnSpc>
@@ -5199,7 +5319,7 @@
           <a:srgbClr val="000000"/>
         </a:buClr>
         <a:buFont typeface="Arial"/>
-        <a:defRPr b="0" i="0" sz="1400" u="none" cap="none" strike="noStrike">
+        <a:defRPr sz="1400" b="0" i="0" u="none" strike="noStrike" cap="none">
           <a:solidFill>
             <a:srgbClr val="000000"/>
           </a:solidFill>
@@ -5211,7 +5331,7 @@
       </a:lvl9pPr>
     </p:bodyStyle>
     <p:otherStyle>
-      <a:defPPr lvl="0" marR="0" rtl="0" algn="l">
+      <a:defPPr marR="0" lvl="0" algn="l" rtl="0">
         <a:lnSpc>
           <a:spcPct val="100000"/>
         </a:lnSpc>
@@ -5222,7 +5342,7 @@
           <a:spcPts val="0"/>
         </a:spcAft>
       </a:defPPr>
-      <a:lvl1pPr lvl="0" marR="0" rtl="0" algn="l">
+      <a:lvl1pPr marR="0" lvl="0" algn="l" rtl="0">
         <a:lnSpc>
           <a:spcPct val="100000"/>
         </a:lnSpc>
@@ -5236,7 +5356,7 @@
           <a:srgbClr val="000000"/>
         </a:buClr>
         <a:buFont typeface="Arial"/>
-        <a:defRPr b="0" i="0" sz="1400" u="none" cap="none" strike="noStrike">
+        <a:defRPr sz="1400" b="0" i="0" u="none" strike="noStrike" cap="none">
           <a:solidFill>
             <a:srgbClr val="000000"/>
           </a:solidFill>
@@ -5246,7 +5366,7 @@
           <a:sym typeface="Arial"/>
         </a:defRPr>
       </a:lvl1pPr>
-      <a:lvl2pPr lvl="1" marR="0" rtl="0" algn="l">
+      <a:lvl2pPr marR="0" lvl="1" algn="l" rtl="0">
         <a:lnSpc>
           <a:spcPct val="100000"/>
         </a:lnSpc>
@@ -5260,7 +5380,7 @@
           <a:srgbClr val="000000"/>
         </a:buClr>
         <a:buFont typeface="Arial"/>
-        <a:defRPr b="0" i="0" sz="1400" u="none" cap="none" strike="noStrike">
+        <a:defRPr sz="1400" b="0" i="0" u="none" strike="noStrike" cap="none">
           <a:solidFill>
             <a:srgbClr val="000000"/>
           </a:solidFill>
@@ -5270,7 +5390,7 @@
           <a:sym typeface="Arial"/>
         </a:defRPr>
       </a:lvl2pPr>
-      <a:lvl3pPr lvl="2" marR="0" rtl="0" algn="l">
+      <a:lvl3pPr marR="0" lvl="2" algn="l" rtl="0">
         <a:lnSpc>
           <a:spcPct val="100000"/>
         </a:lnSpc>
@@ -5284,7 +5404,7 @@
           <a:srgbClr val="000000"/>
         </a:buClr>
         <a:buFont typeface="Arial"/>
-        <a:defRPr b="0" i="0" sz="1400" u="none" cap="none" strike="noStrike">
+        <a:defRPr sz="1400" b="0" i="0" u="none" strike="noStrike" cap="none">
           <a:solidFill>
             <a:srgbClr val="000000"/>
           </a:solidFill>
@@ -5294,7 +5414,7 @@
           <a:sym typeface="Arial"/>
         </a:defRPr>
       </a:lvl3pPr>
-      <a:lvl4pPr lvl="3" marR="0" rtl="0" algn="l">
+      <a:lvl4pPr marR="0" lvl="3" algn="l" rtl="0">
         <a:lnSpc>
           <a:spcPct val="100000"/>
         </a:lnSpc>
@@ -5308,7 +5428,7 @@
           <a:srgbClr val="000000"/>
         </a:buClr>
         <a:buFont typeface="Arial"/>
-        <a:defRPr b="0" i="0" sz="1400" u="none" cap="none" strike="noStrike">
+        <a:defRPr sz="1400" b="0" i="0" u="none" strike="noStrike" cap="none">
           <a:solidFill>
             <a:srgbClr val="000000"/>
           </a:solidFill>
@@ -5318,7 +5438,7 @@
           <a:sym typeface="Arial"/>
         </a:defRPr>
       </a:lvl4pPr>
-      <a:lvl5pPr lvl="4" marR="0" rtl="0" algn="l">
+      <a:lvl5pPr marR="0" lvl="4" algn="l" rtl="0">
         <a:lnSpc>
           <a:spcPct val="100000"/>
         </a:lnSpc>
@@ -5332,7 +5452,7 @@
           <a:srgbClr val="000000"/>
         </a:buClr>
         <a:buFont typeface="Arial"/>
-        <a:defRPr b="0" i="0" sz="1400" u="none" cap="none" strike="noStrike">
+        <a:defRPr sz="1400" b="0" i="0" u="none" strike="noStrike" cap="none">
           <a:solidFill>
             <a:srgbClr val="000000"/>
           </a:solidFill>
@@ -5342,7 +5462,7 @@
           <a:sym typeface="Arial"/>
         </a:defRPr>
       </a:lvl5pPr>
-      <a:lvl6pPr lvl="5" marR="0" rtl="0" algn="l">
+      <a:lvl6pPr marR="0" lvl="5" algn="l" rtl="0">
         <a:lnSpc>
           <a:spcPct val="100000"/>
         </a:lnSpc>
@@ -5356,7 +5476,7 @@
           <a:srgbClr val="000000"/>
         </a:buClr>
         <a:buFont typeface="Arial"/>
-        <a:defRPr b="0" i="0" sz="1400" u="none" cap="none" strike="noStrike">
+        <a:defRPr sz="1400" b="0" i="0" u="none" strike="noStrike" cap="none">
           <a:solidFill>
             <a:srgbClr val="000000"/>
           </a:solidFill>
@@ -5366,7 +5486,7 @@
           <a:sym typeface="Arial"/>
         </a:defRPr>
       </a:lvl6pPr>
-      <a:lvl7pPr lvl="6" marR="0" rtl="0" algn="l">
+      <a:lvl7pPr marR="0" lvl="6" algn="l" rtl="0">
         <a:lnSpc>
           <a:spcPct val="100000"/>
         </a:lnSpc>
@@ -5380,7 +5500,7 @@
           <a:srgbClr val="000000"/>
         </a:buClr>
         <a:buFont typeface="Arial"/>
-        <a:defRPr b="0" i="0" sz="1400" u="none" cap="none" strike="noStrike">
+        <a:defRPr sz="1400" b="0" i="0" u="none" strike="noStrike" cap="none">
           <a:solidFill>
             <a:srgbClr val="000000"/>
           </a:solidFill>
@@ -5390,7 +5510,7 @@
           <a:sym typeface="Arial"/>
         </a:defRPr>
       </a:lvl7pPr>
-      <a:lvl8pPr lvl="7" marR="0" rtl="0" algn="l">
+      <a:lvl8pPr marR="0" lvl="7" algn="l" rtl="0">
         <a:lnSpc>
           <a:spcPct val="100000"/>
         </a:lnSpc>
@@ -5404,7 +5524,7 @@
           <a:srgbClr val="000000"/>
         </a:buClr>
         <a:buFont typeface="Arial"/>
-        <a:defRPr b="0" i="0" sz="1400" u="none" cap="none" strike="noStrike">
+        <a:defRPr sz="1400" b="0" i="0" u="none" strike="noStrike" cap="none">
           <a:solidFill>
             <a:srgbClr val="000000"/>
           </a:solidFill>
@@ -5414,7 +5534,7 @@
           <a:sym typeface="Arial"/>
         </a:defRPr>
       </a:lvl8pPr>
-      <a:lvl9pPr lvl="8" marR="0" rtl="0" algn="l">
+      <a:lvl9pPr marR="0" lvl="8" algn="l" rtl="0">
         <a:lnSpc>
           <a:spcPct val="100000"/>
         </a:lnSpc>
@@ -5428,7 +5548,7 @@
           <a:srgbClr val="000000"/>
         </a:buClr>
         <a:buFont typeface="Arial"/>
-        <a:defRPr b="0" i="0" sz="1400" u="none" cap="none" strike="noStrike">
+        <a:defRPr sz="1400" b="0" i="0" u="none" strike="noStrike" cap="none">
           <a:solidFill>
             <a:srgbClr val="000000"/>
           </a:solidFill>
@@ -5444,7 +5564,7 @@
 </file>
 
 <file path=ppt/slides/slide1.xml><?xml version="1.0" encoding="utf-8"?>
-<p:sld xmlns:a="http://schemas.openxmlformats.org/drawingml/2006/main" xmlns:r="http://schemas.openxmlformats.org/officeDocument/2006/relationships" xmlns:mc="http://schemas.openxmlformats.org/markup-compatibility/2006" xmlns:mv="urn:schemas-microsoft-com:mac:vml" xmlns:p="http://schemas.openxmlformats.org/presentationml/2006/main" xmlns:c="http://schemas.openxmlformats.org/drawingml/2006/chart" xmlns:dgm="http://schemas.openxmlformats.org/drawingml/2006/diagram" xmlns:o="urn:schemas-microsoft-com:office:office" xmlns:v="urn:schemas-microsoft-com:vml" xmlns:pvml="urn:schemas-microsoft-com:office:powerpoint" xmlns:com="http://schemas.openxmlformats.org/drawingml/2006/compatibility" xmlns:p14="http://schemas.microsoft.com/office/powerpoint/2010/main" xmlns:p15="http://schemas.microsoft.com/office/powerpoint/2012/main" xmlns:ahyp="http://schemas.microsoft.com/office/drawing/2018/hyperlinkcolor">
+<p:sld xmlns:a="http://schemas.openxmlformats.org/drawingml/2006/main" xmlns:r="http://schemas.openxmlformats.org/officeDocument/2006/relationships" xmlns:p="http://schemas.openxmlformats.org/presentationml/2006/main">
   <p:cSld>
     <p:bg>
       <p:bgPr>
@@ -5456,11 +5576,12 @@
             <a:fillRect/>
           </a:stretch>
         </a:blipFill>
+        <a:effectLst/>
       </p:bgPr>
     </p:bg>
     <p:spTree>
       <p:nvGrpSpPr>
-        <p:cNvPr id="53" name="Shape 53"/>
+        <p:cNvPr id="1" name="Shape 53"/>
         <p:cNvGrpSpPr/>
         <p:nvPr/>
       </p:nvGrpSpPr>
@@ -5492,12 +5613,12 @@
           </a:ln>
         </p:spPr>
         <p:txBody>
-          <a:bodyPr anchorCtr="0" anchor="t" bIns="91425" lIns="91425" spcFirstLastPara="1" rIns="91425" wrap="square" tIns="91425">
+          <a:bodyPr spcFirstLastPara="1" wrap="square" lIns="91425" tIns="91425" rIns="91425" bIns="91425" anchor="t" anchorCtr="0">
             <a:noAutofit/>
           </a:bodyPr>
           <a:lstStyle/>
           <a:p>
-            <a:pPr indent="0" lvl="0" marL="0" rtl="0" algn="l">
+            <a:pPr marL="0" lvl="0" indent="0" algn="l" rtl="0">
               <a:spcBef>
                 <a:spcPts val="0"/>
               </a:spcBef>
@@ -5512,7 +5633,7 @@
               <a:buNone/>
             </a:pPr>
             <a:r>
-              <a:rPr b="1" lang="en" sz="2000">
+              <a:rPr lang="en" sz="2000" b="1" dirty="0">
                 <a:solidFill>
                   <a:schemeClr val="lt1"/>
                 </a:solidFill>
@@ -5521,9 +5642,9 @@
                 <a:cs typeface="Archivo"/>
                 <a:sym typeface="Archivo"/>
               </a:rPr>
-              <a:t>&lt;&lt;Nombre 2° Lugar&gt;&gt;</a:t>
+              <a:t>&lt;&lt;nom_2&gt;&gt;</a:t>
             </a:r>
-            <a:endParaRPr b="1" sz="2000">
+            <a:endParaRPr sz="2000" b="1" dirty="0">
               <a:solidFill>
                 <a:schemeClr val="lt1"/>
               </a:solidFill>
@@ -5555,22 +5676,14 @@
           </a:ln>
         </p:spPr>
         <p:txBody>
-          <a:bodyPr anchorCtr="0" anchor="ctr" bIns="91425" lIns="91425" spcFirstLastPara="1" rIns="91425" wrap="square" tIns="91425">
+          <a:bodyPr spcFirstLastPara="1" wrap="square" lIns="91425" tIns="91425" rIns="91425" bIns="91425" anchor="ctr" anchorCtr="0">
             <a:noAutofit/>
           </a:bodyPr>
           <a:lstStyle/>
           <a:p>
-            <a:pPr indent="0" lvl="0" marL="0" rtl="0" algn="ctr">
-              <a:spcBef>
-                <a:spcPts val="0"/>
-              </a:spcBef>
-              <a:spcAft>
-                <a:spcPts val="0"/>
-              </a:spcAft>
-              <a:buNone/>
-            </a:pPr>
+            <a:pPr lvl="0" algn="ctr"/>
             <a:r>
-              <a:rPr b="1" lang="en" sz="8500">
+              <a:rPr lang="en" sz="8500" b="1" dirty="0">
                 <a:solidFill>
                   <a:schemeClr val="lt1"/>
                 </a:solidFill>
@@ -5579,9 +5692,9 @@
                 <a:cs typeface="Archivo"/>
                 <a:sym typeface="Archivo"/>
               </a:rPr>
-              <a:t>&lt;&lt;Porcentaje 1° Lugar&gt;&gt;</a:t>
+              <a:t>&lt;&lt;por_1&gt;&gt;</a:t>
             </a:r>
-            <a:endParaRPr b="1" sz="8500">
+            <a:endParaRPr sz="8500" b="1" dirty="0">
               <a:solidFill>
                 <a:schemeClr val="lt1"/>
               </a:solidFill>
@@ -5613,12 +5726,12 @@
           </a:ln>
         </p:spPr>
         <p:txBody>
-          <a:bodyPr anchorCtr="0" anchor="ctr" bIns="91425" lIns="91425" spcFirstLastPara="1" rIns="91425" wrap="square" tIns="91425">
+          <a:bodyPr spcFirstLastPara="1" wrap="square" lIns="91425" tIns="91425" rIns="91425" bIns="91425" anchor="ctr" anchorCtr="0">
             <a:noAutofit/>
           </a:bodyPr>
           <a:lstStyle/>
           <a:p>
-            <a:pPr indent="0" lvl="0" marL="0" rtl="0" algn="ctr">
+            <a:pPr marL="0" lvl="0" indent="0" algn="ctr" rtl="0">
               <a:spcBef>
                 <a:spcPts val="0"/>
               </a:spcBef>
@@ -5633,7 +5746,7 @@
               <a:buNone/>
             </a:pPr>
             <a:r>
-              <a:rPr b="1" lang="en" sz="8500">
+              <a:rPr lang="en-GB" sz="8500" b="1" dirty="0">
                 <a:solidFill>
                   <a:schemeClr val="lt1"/>
                 </a:solidFill>
@@ -5642,9 +5755,9 @@
                 <a:cs typeface="Archivo"/>
                 <a:sym typeface="Archivo"/>
               </a:rPr>
-              <a:t>&lt;&lt;Porcentaje 3° Lugar&gt;&gt;</a:t>
+              <a:t>&lt;&lt;por_3&gt;&gt;</a:t>
             </a:r>
-            <a:endParaRPr b="1" sz="8500">
+            <a:endParaRPr sz="8500" b="1" dirty="0">
               <a:solidFill>
                 <a:schemeClr val="lt1"/>
               </a:solidFill>
@@ -5655,7 +5768,7 @@
             </a:endParaRPr>
           </a:p>
           <a:p>
-            <a:pPr indent="0" lvl="0" marL="0" rtl="0" algn="ctr">
+            <a:pPr marL="0" lvl="0" indent="0" algn="ctr" rtl="0">
               <a:spcBef>
                 <a:spcPts val="0"/>
               </a:spcBef>
@@ -5664,10 +5777,7 @@
               </a:spcAft>
               <a:buNone/>
             </a:pPr>
-            <a:r>
-              <a:t/>
-            </a:r>
-            <a:endParaRPr b="1" sz="8500">
+            <a:endParaRPr sz="8500" b="1" dirty="0">
               <a:solidFill>
                 <a:schemeClr val="lt1"/>
               </a:solidFill>
@@ -5699,12 +5809,12 @@
           </a:ln>
         </p:spPr>
         <p:txBody>
-          <a:bodyPr anchorCtr="0" anchor="t" bIns="91425" lIns="91425" spcFirstLastPara="1" rIns="91425" wrap="square" tIns="91425">
+          <a:bodyPr spcFirstLastPara="1" wrap="square" lIns="91425" tIns="91425" rIns="91425" bIns="91425" anchor="t" anchorCtr="0">
             <a:noAutofit/>
           </a:bodyPr>
           <a:lstStyle/>
           <a:p>
-            <a:pPr indent="0" lvl="0" marL="0" rtl="0" algn="l">
+            <a:pPr marL="0" lvl="0" indent="0" algn="l" rtl="0">
               <a:spcBef>
                 <a:spcPts val="0"/>
               </a:spcBef>
@@ -5719,7 +5829,7 @@
               <a:buNone/>
             </a:pPr>
             <a:r>
-              <a:rPr b="1" lang="en" sz="2000">
+              <a:rPr lang="en" sz="2000" b="1" dirty="0">
                 <a:solidFill>
                   <a:schemeClr val="lt1"/>
                 </a:solidFill>
@@ -5728,9 +5838,9 @@
                 <a:cs typeface="Archivo"/>
                 <a:sym typeface="Archivo"/>
               </a:rPr>
-              <a:t>&lt;&lt;Nombre 3° Lugar&gt;&gt;</a:t>
+              <a:t>&lt;&lt;nom_3&gt;&gt;</a:t>
             </a:r>
-            <a:endParaRPr b="1" sz="2000">
+            <a:endParaRPr sz="2000" b="1" dirty="0">
               <a:solidFill>
                 <a:schemeClr val="lt1"/>
               </a:solidFill>
@@ -5762,12 +5872,12 @@
           </a:ln>
         </p:spPr>
         <p:txBody>
-          <a:bodyPr anchorCtr="0" anchor="ctr" bIns="91425" lIns="91425" spcFirstLastPara="1" rIns="91425" wrap="square" tIns="91425">
+          <a:bodyPr spcFirstLastPara="1" wrap="square" lIns="91425" tIns="91425" rIns="91425" bIns="91425" anchor="ctr" anchorCtr="0">
             <a:noAutofit/>
           </a:bodyPr>
           <a:lstStyle/>
           <a:p>
-            <a:pPr indent="0" lvl="0" marL="0" rtl="0" algn="ctr">
+            <a:pPr marL="0" lvl="0" indent="0" algn="ctr" rtl="0">
               <a:spcBef>
                 <a:spcPts val="0"/>
               </a:spcBef>
@@ -5782,7 +5892,7 @@
               <a:buNone/>
             </a:pPr>
             <a:r>
-              <a:rPr b="1" lang="en" sz="8500">
+              <a:rPr lang="en-GB" sz="8500" b="1" dirty="0">
                 <a:solidFill>
                   <a:schemeClr val="lt1"/>
                 </a:solidFill>
@@ -5791,9 +5901,9 @@
                 <a:cs typeface="Archivo"/>
                 <a:sym typeface="Archivo"/>
               </a:rPr>
-              <a:t>&lt;&lt;Porcentaje 2° Lugar&gt;&gt;</a:t>
+              <a:t>&lt;&lt;por_2&gt;&gt;</a:t>
             </a:r>
-            <a:endParaRPr b="1" sz="8500">
+            <a:endParaRPr sz="8500" b="1" dirty="0">
               <a:solidFill>
                 <a:schemeClr val="lt1"/>
               </a:solidFill>
@@ -5804,7 +5914,7 @@
             </a:endParaRPr>
           </a:p>
           <a:p>
-            <a:pPr indent="0" lvl="0" marL="0" rtl="0" algn="ctr">
+            <a:pPr marL="0" lvl="0" indent="0" algn="ctr" rtl="0">
               <a:spcBef>
                 <a:spcPts val="0"/>
               </a:spcBef>
@@ -5813,10 +5923,7 @@
               </a:spcAft>
               <a:buNone/>
             </a:pPr>
-            <a:r>
-              <a:t/>
-            </a:r>
-            <a:endParaRPr b="1" sz="8500">
+            <a:endParaRPr sz="8500" b="1" dirty="0">
               <a:solidFill>
                 <a:schemeClr val="lt1"/>
               </a:solidFill>
@@ -5848,12 +5955,12 @@
           </a:ln>
         </p:spPr>
         <p:txBody>
-          <a:bodyPr anchorCtr="0" anchor="t" bIns="91425" lIns="91425" spcFirstLastPara="1" rIns="91425" wrap="square" tIns="91425">
+          <a:bodyPr spcFirstLastPara="1" wrap="square" lIns="91425" tIns="91425" rIns="91425" bIns="91425" anchor="t" anchorCtr="0">
             <a:noAutofit/>
           </a:bodyPr>
           <a:lstStyle/>
           <a:p>
-            <a:pPr indent="0" lvl="0" marL="0" rtl="0" algn="l">
+            <a:pPr marL="0" lvl="0" indent="0" algn="l" rtl="0">
               <a:spcBef>
                 <a:spcPts val="0"/>
               </a:spcBef>
@@ -5863,7 +5970,7 @@
               <a:buNone/>
             </a:pPr>
             <a:r>
-              <a:rPr b="1" lang="en" sz="2000">
+              <a:rPr lang="en" sz="2000" b="1" dirty="0">
                 <a:solidFill>
                   <a:schemeClr val="lt1"/>
                 </a:solidFill>
@@ -5872,9 +5979,9 @@
                 <a:cs typeface="Archivo"/>
                 <a:sym typeface="Archivo"/>
               </a:rPr>
-              <a:t>&lt;&lt;Nombre 1° Lugar&gt;&gt;</a:t>
+              <a:t>&lt;&lt;nom_1&gt;&gt;</a:t>
             </a:r>
-            <a:endParaRPr b="1" sz="2000">
+            <a:endParaRPr sz="2000" b="1" dirty="0">
               <a:solidFill>
                 <a:schemeClr val="lt1"/>
               </a:solidFill>
@@ -5895,7 +6002,288 @@
 </file>
 
 <file path=ppt/theme/theme1.xml><?xml version="1.0" encoding="utf-8"?>
-<a:theme xmlns:a="http://schemas.openxmlformats.org/drawingml/2006/main" xmlns:r="http://schemas.openxmlformats.org/officeDocument/2006/relationships">
+<a:theme xmlns:a="http://schemas.openxmlformats.org/drawingml/2006/main" name="Simple Light">
+  <a:themeElements>
+    <a:clrScheme name="Simple Light">
+      <a:dk1>
+        <a:srgbClr val="000000"/>
+      </a:dk1>
+      <a:lt1>
+        <a:srgbClr val="FFFFFF"/>
+      </a:lt1>
+      <a:dk2>
+        <a:srgbClr val="595959"/>
+      </a:dk2>
+      <a:lt2>
+        <a:srgbClr val="EEEEEE"/>
+      </a:lt2>
+      <a:accent1>
+        <a:srgbClr val="4285F4"/>
+      </a:accent1>
+      <a:accent2>
+        <a:srgbClr val="212121"/>
+      </a:accent2>
+      <a:accent3>
+        <a:srgbClr val="78909C"/>
+      </a:accent3>
+      <a:accent4>
+        <a:srgbClr val="FFAB40"/>
+      </a:accent4>
+      <a:accent5>
+        <a:srgbClr val="0097A7"/>
+      </a:accent5>
+      <a:accent6>
+        <a:srgbClr val="EEFF41"/>
+      </a:accent6>
+      <a:hlink>
+        <a:srgbClr val="0097A7"/>
+      </a:hlink>
+      <a:folHlink>
+        <a:srgbClr val="0097A7"/>
+      </a:folHlink>
+    </a:clrScheme>
+    <a:fontScheme name="Office">
+      <a:majorFont>
+        <a:latin typeface="Arial"/>
+        <a:ea typeface=""/>
+        <a:cs typeface=""/>
+        <a:font script="Jpan" typeface="ＭＳ Ｐゴシック"/>
+        <a:font script="Hang" typeface="맑은 고딕"/>
+        <a:font script="Hans" typeface="宋体"/>
+        <a:font script="Hant" typeface="新細明體"/>
+        <a:font script="Arab" typeface="Times New Roman"/>
+        <a:font script="Hebr" typeface="Times New Roman"/>
+        <a:font script="Thai" typeface="Angsana New"/>
+        <a:font script="Ethi" typeface="Nyala"/>
+        <a:font script="Beng" typeface="Vrinda"/>
+        <a:font script="Gujr" typeface="Shruti"/>
+        <a:font script="Khmr" typeface="MoolBoran"/>
+        <a:font script="Knda" typeface="Tunga"/>
+        <a:font script="Guru" typeface="Raavi"/>
+        <a:font script="Cans" typeface="Euphemia"/>
+        <a:font script="Cher" typeface="Plantagenet Cherokee"/>
+        <a:font script="Yiii" typeface="Microsoft Yi Baiti"/>
+        <a:font script="Tibt" typeface="Microsoft Himalaya"/>
+        <a:font script="Thaa" typeface="MV Boli"/>
+        <a:font script="Deva" typeface="Mangal"/>
+        <a:font script="Telu" typeface="Gautami"/>
+        <a:font script="Taml" typeface="Latha"/>
+        <a:font script="Syrc" typeface="Estrangelo Edessa"/>
+        <a:font script="Orya" typeface="Kalinga"/>
+        <a:font script="Mlym" typeface="Kartika"/>
+        <a:font script="Laoo" typeface="DokChampa"/>
+        <a:font script="Sinh" typeface="Iskoola Pota"/>
+        <a:font script="Mong" typeface="Mongolian Baiti"/>
+        <a:font script="Viet" typeface="Times New Roman"/>
+        <a:font script="Uigh" typeface="Microsoft Uighur"/>
+        <a:font script="Geor" typeface="Sylfaen"/>
+      </a:majorFont>
+      <a:minorFont>
+        <a:latin typeface="Arial"/>
+        <a:ea typeface=""/>
+        <a:cs typeface=""/>
+        <a:font script="Jpan" typeface="ＭＳ Ｐゴシック"/>
+        <a:font script="Hang" typeface="맑은 고딕"/>
+        <a:font script="Hans" typeface="宋体"/>
+        <a:font script="Hant" typeface="新細明體"/>
+        <a:font script="Arab" typeface="Arial"/>
+        <a:font script="Hebr" typeface="Arial"/>
+        <a:font script="Thai" typeface="Cordia New"/>
+        <a:font script="Ethi" typeface="Nyala"/>
+        <a:font script="Beng" typeface="Vrinda"/>
+        <a:font script="Gujr" typeface="Shruti"/>
+        <a:font script="Khmr" typeface="DaunPenh"/>
+        <a:font script="Knda" typeface="Tunga"/>
+        <a:font script="Guru" typeface="Raavi"/>
+        <a:font script="Cans" typeface="Euphemia"/>
+        <a:font script="Cher" typeface="Plantagenet Cherokee"/>
+        <a:font script="Yiii" typeface="Microsoft Yi Baiti"/>
+        <a:font script="Tibt" typeface="Microsoft Himalaya"/>
+        <a:font script="Thaa" typeface="MV Boli"/>
+        <a:font script="Deva" typeface="Mangal"/>
+        <a:font script="Telu" typeface="Gautami"/>
+        <a:font script="Taml" typeface="Latha"/>
+        <a:font script="Syrc" typeface="Estrangelo Edessa"/>
+        <a:font script="Orya" typeface="Kalinga"/>
+        <a:font script="Mlym" typeface="Kartika"/>
+        <a:font script="Laoo" typeface="DokChampa"/>
+        <a:font script="Sinh" typeface="Iskoola Pota"/>
+        <a:font script="Mong" typeface="Mongolian Baiti"/>
+        <a:font script="Viet" typeface="Arial"/>
+        <a:font script="Uigh" typeface="Microsoft Uighur"/>
+        <a:font script="Geor" typeface="Sylfaen"/>
+      </a:minorFont>
+    </a:fontScheme>
+    <a:fmtScheme name="Office">
+      <a:fillStyleLst>
+        <a:solidFill>
+          <a:schemeClr val="phClr"/>
+        </a:solidFill>
+        <a:gradFill rotWithShape="1">
+          <a:gsLst>
+            <a:gs pos="0">
+              <a:schemeClr val="phClr">
+                <a:tint val="50000"/>
+                <a:satMod val="300000"/>
+              </a:schemeClr>
+            </a:gs>
+            <a:gs pos="35000">
+              <a:schemeClr val="phClr">
+                <a:tint val="37000"/>
+                <a:satMod val="300000"/>
+              </a:schemeClr>
+            </a:gs>
+            <a:gs pos="100000">
+              <a:schemeClr val="phClr">
+                <a:tint val="15000"/>
+                <a:satMod val="350000"/>
+              </a:schemeClr>
+            </a:gs>
+          </a:gsLst>
+          <a:lin ang="16200000" scaled="1"/>
+        </a:gradFill>
+        <a:gradFill rotWithShape="1">
+          <a:gsLst>
+            <a:gs pos="0">
+              <a:schemeClr val="phClr">
+                <a:tint val="100000"/>
+                <a:shade val="100000"/>
+                <a:satMod val="130000"/>
+              </a:schemeClr>
+            </a:gs>
+            <a:gs pos="100000">
+              <a:schemeClr val="phClr">
+                <a:tint val="50000"/>
+                <a:shade val="100000"/>
+                <a:satMod val="350000"/>
+              </a:schemeClr>
+            </a:gs>
+          </a:gsLst>
+          <a:lin ang="16200000" scaled="0"/>
+        </a:gradFill>
+      </a:fillStyleLst>
+      <a:lnStyleLst>
+        <a:ln w="9525" cap="flat" cmpd="sng" algn="ctr">
+          <a:solidFill>
+            <a:schemeClr val="phClr">
+              <a:shade val="95000"/>
+              <a:satMod val="105000"/>
+            </a:schemeClr>
+          </a:solidFill>
+          <a:prstDash val="solid"/>
+        </a:ln>
+        <a:ln w="25400" cap="flat" cmpd="sng" algn="ctr">
+          <a:solidFill>
+            <a:schemeClr val="phClr"/>
+          </a:solidFill>
+          <a:prstDash val="solid"/>
+        </a:ln>
+        <a:ln w="38100" cap="flat" cmpd="sng" algn="ctr">
+          <a:solidFill>
+            <a:schemeClr val="phClr"/>
+          </a:solidFill>
+          <a:prstDash val="solid"/>
+        </a:ln>
+      </a:lnStyleLst>
+      <a:effectStyleLst>
+        <a:effectStyle>
+          <a:effectLst>
+            <a:outerShdw blurRad="40000" dist="20000" dir="5400000" rotWithShape="0">
+              <a:srgbClr val="000000">
+                <a:alpha val="38000"/>
+              </a:srgbClr>
+            </a:outerShdw>
+          </a:effectLst>
+        </a:effectStyle>
+        <a:effectStyle>
+          <a:effectLst>
+            <a:outerShdw blurRad="40000" dist="23000" dir="5400000" rotWithShape="0">
+              <a:srgbClr val="000000">
+                <a:alpha val="35000"/>
+              </a:srgbClr>
+            </a:outerShdw>
+          </a:effectLst>
+        </a:effectStyle>
+        <a:effectStyle>
+          <a:effectLst>
+            <a:outerShdw blurRad="40000" dist="23000" dir="5400000" rotWithShape="0">
+              <a:srgbClr val="000000">
+                <a:alpha val="35000"/>
+              </a:srgbClr>
+            </a:outerShdw>
+          </a:effectLst>
+          <a:scene3d>
+            <a:camera prst="orthographicFront">
+              <a:rot lat="0" lon="0" rev="0"/>
+            </a:camera>
+            <a:lightRig rig="threePt" dir="t">
+              <a:rot lat="0" lon="0" rev="1200000"/>
+            </a:lightRig>
+          </a:scene3d>
+          <a:sp3d>
+            <a:bevelT w="63500" h="25400"/>
+          </a:sp3d>
+        </a:effectStyle>
+      </a:effectStyleLst>
+      <a:bgFillStyleLst>
+        <a:solidFill>
+          <a:schemeClr val="phClr"/>
+        </a:solidFill>
+        <a:gradFill rotWithShape="1">
+          <a:gsLst>
+            <a:gs pos="0">
+              <a:schemeClr val="phClr">
+                <a:tint val="40000"/>
+                <a:satMod val="350000"/>
+              </a:schemeClr>
+            </a:gs>
+            <a:gs pos="40000">
+              <a:schemeClr val="phClr">
+                <a:tint val="45000"/>
+                <a:shade val="99000"/>
+                <a:satMod val="350000"/>
+              </a:schemeClr>
+            </a:gs>
+            <a:gs pos="100000">
+              <a:schemeClr val="phClr">
+                <a:shade val="20000"/>
+                <a:satMod val="255000"/>
+              </a:schemeClr>
+            </a:gs>
+          </a:gsLst>
+          <a:path path="circle">
+            <a:fillToRect l="50000" t="-80000" r="50000" b="180000"/>
+          </a:path>
+        </a:gradFill>
+        <a:gradFill rotWithShape="1">
+          <a:gsLst>
+            <a:gs pos="0">
+              <a:schemeClr val="phClr">
+                <a:tint val="80000"/>
+                <a:satMod val="300000"/>
+              </a:schemeClr>
+            </a:gs>
+            <a:gs pos="100000">
+              <a:schemeClr val="phClr">
+                <a:shade val="30000"/>
+                <a:satMod val="200000"/>
+              </a:schemeClr>
+            </a:gs>
+          </a:gsLst>
+          <a:path path="circle">
+            <a:fillToRect l="50000" t="50000" r="50000" b="50000"/>
+          </a:path>
+        </a:gradFill>
+      </a:bgFillStyleLst>
+    </a:fmtScheme>
+  </a:themeElements>
+  <a:objectDefaults/>
+  <a:extraClrSchemeLst/>
+</a:theme>
+</file>
+
+<file path=ppt/theme/theme2.xml><?xml version="1.0" encoding="utf-8"?>
+<a:theme xmlns:a="http://schemas.openxmlformats.org/drawingml/2006/main">
   <a:themeElements>
     <a:clrScheme name="Default">
       <a:dk1>
@@ -6170,284 +6558,7 @@
       </a:bgFillStyleLst>
     </a:fmtScheme>
   </a:themeElements>
-</a:theme>
-</file>
-
-<file path=ppt/theme/theme2.xml><?xml version="1.0" encoding="utf-8"?>
-<a:theme xmlns:a="http://schemas.openxmlformats.org/drawingml/2006/main" xmlns:r="http://schemas.openxmlformats.org/officeDocument/2006/relationships" name="Simple Light">
-  <a:themeElements>
-    <a:clrScheme name="Simple Light">
-      <a:dk1>
-        <a:srgbClr val="000000"/>
-      </a:dk1>
-      <a:lt1>
-        <a:srgbClr val="FFFFFF"/>
-      </a:lt1>
-      <a:dk2>
-        <a:srgbClr val="595959"/>
-      </a:dk2>
-      <a:lt2>
-        <a:srgbClr val="EEEEEE"/>
-      </a:lt2>
-      <a:accent1>
-        <a:srgbClr val="4285F4"/>
-      </a:accent1>
-      <a:accent2>
-        <a:srgbClr val="212121"/>
-      </a:accent2>
-      <a:accent3>
-        <a:srgbClr val="78909C"/>
-      </a:accent3>
-      <a:accent4>
-        <a:srgbClr val="FFAB40"/>
-      </a:accent4>
-      <a:accent5>
-        <a:srgbClr val="0097A7"/>
-      </a:accent5>
-      <a:accent6>
-        <a:srgbClr val="EEFF41"/>
-      </a:accent6>
-      <a:hlink>
-        <a:srgbClr val="0097A7"/>
-      </a:hlink>
-      <a:folHlink>
-        <a:srgbClr val="0097A7"/>
-      </a:folHlink>
-    </a:clrScheme>
-    <a:fontScheme name="Office">
-      <a:majorFont>
-        <a:latin typeface="Arial"/>
-        <a:ea typeface=""/>
-        <a:cs typeface=""/>
-        <a:font script="Jpan" typeface="ＭＳ Ｐゴシック"/>
-        <a:font script="Hang" typeface="맑은 고딕"/>
-        <a:font script="Hans" typeface="宋体"/>
-        <a:font script="Hant" typeface="新細明體"/>
-        <a:font script="Arab" typeface="Times New Roman"/>
-        <a:font script="Hebr" typeface="Times New Roman"/>
-        <a:font script="Thai" typeface="Angsana New"/>
-        <a:font script="Ethi" typeface="Nyala"/>
-        <a:font script="Beng" typeface="Vrinda"/>
-        <a:font script="Gujr" typeface="Shruti"/>
-        <a:font script="Khmr" typeface="MoolBoran"/>
-        <a:font script="Knda" typeface="Tunga"/>
-        <a:font script="Guru" typeface="Raavi"/>
-        <a:font script="Cans" typeface="Euphemia"/>
-        <a:font script="Cher" typeface="Plantagenet Cherokee"/>
-        <a:font script="Yiii" typeface="Microsoft Yi Baiti"/>
-        <a:font script="Tibt" typeface="Microsoft Himalaya"/>
-        <a:font script="Thaa" typeface="MV Boli"/>
-        <a:font script="Deva" typeface="Mangal"/>
-        <a:font script="Telu" typeface="Gautami"/>
-        <a:font script="Taml" typeface="Latha"/>
-        <a:font script="Syrc" typeface="Estrangelo Edessa"/>
-        <a:font script="Orya" typeface="Kalinga"/>
-        <a:font script="Mlym" typeface="Kartika"/>
-        <a:font script="Laoo" typeface="DokChampa"/>
-        <a:font script="Sinh" typeface="Iskoola Pota"/>
-        <a:font script="Mong" typeface="Mongolian Baiti"/>
-        <a:font script="Viet" typeface="Times New Roman"/>
-        <a:font script="Uigh" typeface="Microsoft Uighur"/>
-        <a:font script="Geor" typeface="Sylfaen"/>
-      </a:majorFont>
-      <a:minorFont>
-        <a:latin typeface="Arial"/>
-        <a:ea typeface=""/>
-        <a:cs typeface=""/>
-        <a:font script="Jpan" typeface="ＭＳ Ｐゴシック"/>
-        <a:font script="Hang" typeface="맑은 고딕"/>
-        <a:font script="Hans" typeface="宋体"/>
-        <a:font script="Hant" typeface="新細明體"/>
-        <a:font script="Arab" typeface="Arial"/>
-        <a:font script="Hebr" typeface="Arial"/>
-        <a:font script="Thai" typeface="Cordia New"/>
-        <a:font script="Ethi" typeface="Nyala"/>
-        <a:font script="Beng" typeface="Vrinda"/>
-        <a:font script="Gujr" typeface="Shruti"/>
-        <a:font script="Khmr" typeface="DaunPenh"/>
-        <a:font script="Knda" typeface="Tunga"/>
-        <a:font script="Guru" typeface="Raavi"/>
-        <a:font script="Cans" typeface="Euphemia"/>
-        <a:font script="Cher" typeface="Plantagenet Cherokee"/>
-        <a:font script="Yiii" typeface="Microsoft Yi Baiti"/>
-        <a:font script="Tibt" typeface="Microsoft Himalaya"/>
-        <a:font script="Thaa" typeface="MV Boli"/>
-        <a:font script="Deva" typeface="Mangal"/>
-        <a:font script="Telu" typeface="Gautami"/>
-        <a:font script="Taml" typeface="Latha"/>
-        <a:font script="Syrc" typeface="Estrangelo Edessa"/>
-        <a:font script="Orya" typeface="Kalinga"/>
-        <a:font script="Mlym" typeface="Kartika"/>
-        <a:font script="Laoo" typeface="DokChampa"/>
-        <a:font script="Sinh" typeface="Iskoola Pota"/>
-        <a:font script="Mong" typeface="Mongolian Baiti"/>
-        <a:font script="Viet" typeface="Arial"/>
-        <a:font script="Uigh" typeface="Microsoft Uighur"/>
-        <a:font script="Geor" typeface="Sylfaen"/>
-      </a:minorFont>
-    </a:fontScheme>
-    <a:fmtScheme name="Office">
-      <a:fillStyleLst>
-        <a:solidFill>
-          <a:schemeClr val="phClr"/>
-        </a:solidFill>
-        <a:gradFill rotWithShape="1">
-          <a:gsLst>
-            <a:gs pos="0">
-              <a:schemeClr val="phClr">
-                <a:tint val="50000"/>
-                <a:satMod val="300000"/>
-              </a:schemeClr>
-            </a:gs>
-            <a:gs pos="35000">
-              <a:schemeClr val="phClr">
-                <a:tint val="37000"/>
-                <a:satMod val="300000"/>
-              </a:schemeClr>
-            </a:gs>
-            <a:gs pos="100000">
-              <a:schemeClr val="phClr">
-                <a:tint val="15000"/>
-                <a:satMod val="350000"/>
-              </a:schemeClr>
-            </a:gs>
-          </a:gsLst>
-          <a:lin ang="16200000" scaled="1"/>
-        </a:gradFill>
-        <a:gradFill rotWithShape="1">
-          <a:gsLst>
-            <a:gs pos="0">
-              <a:schemeClr val="phClr">
-                <a:tint val="100000"/>
-                <a:shade val="100000"/>
-                <a:satMod val="130000"/>
-              </a:schemeClr>
-            </a:gs>
-            <a:gs pos="100000">
-              <a:schemeClr val="phClr">
-                <a:tint val="50000"/>
-                <a:shade val="100000"/>
-                <a:satMod val="350000"/>
-              </a:schemeClr>
-            </a:gs>
-          </a:gsLst>
-          <a:lin ang="16200000" scaled="0"/>
-        </a:gradFill>
-      </a:fillStyleLst>
-      <a:lnStyleLst>
-        <a:ln w="9525" cap="flat" cmpd="sng" algn="ctr">
-          <a:solidFill>
-            <a:schemeClr val="phClr">
-              <a:shade val="95000"/>
-              <a:satMod val="105000"/>
-            </a:schemeClr>
-          </a:solidFill>
-          <a:prstDash val="solid"/>
-        </a:ln>
-        <a:ln w="25400" cap="flat" cmpd="sng" algn="ctr">
-          <a:solidFill>
-            <a:schemeClr val="phClr"/>
-          </a:solidFill>
-          <a:prstDash val="solid"/>
-        </a:ln>
-        <a:ln w="38100" cap="flat" cmpd="sng" algn="ctr">
-          <a:solidFill>
-            <a:schemeClr val="phClr"/>
-          </a:solidFill>
-          <a:prstDash val="solid"/>
-        </a:ln>
-      </a:lnStyleLst>
-      <a:effectStyleLst>
-        <a:effectStyle>
-          <a:effectLst>
-            <a:outerShdw blurRad="40000" dist="20000" dir="5400000" rotWithShape="0">
-              <a:srgbClr val="000000">
-                <a:alpha val="38000"/>
-              </a:srgbClr>
-            </a:outerShdw>
-          </a:effectLst>
-        </a:effectStyle>
-        <a:effectStyle>
-          <a:effectLst>
-            <a:outerShdw blurRad="40000" dist="23000" dir="5400000" rotWithShape="0">
-              <a:srgbClr val="000000">
-                <a:alpha val="35000"/>
-              </a:srgbClr>
-            </a:outerShdw>
-          </a:effectLst>
-        </a:effectStyle>
-        <a:effectStyle>
-          <a:effectLst>
-            <a:outerShdw blurRad="40000" dist="23000" dir="5400000" rotWithShape="0">
-              <a:srgbClr val="000000">
-                <a:alpha val="35000"/>
-              </a:srgbClr>
-            </a:outerShdw>
-          </a:effectLst>
-          <a:scene3d>
-            <a:camera prst="orthographicFront">
-              <a:rot lat="0" lon="0" rev="0"/>
-            </a:camera>
-            <a:lightRig rig="threePt" dir="t">
-              <a:rot lat="0" lon="0" rev="1200000"/>
-            </a:lightRig>
-          </a:scene3d>
-          <a:sp3d>
-            <a:bevelT w="63500" h="25400"/>
-          </a:sp3d>
-        </a:effectStyle>
-      </a:effectStyleLst>
-      <a:bgFillStyleLst>
-        <a:solidFill>
-          <a:schemeClr val="phClr"/>
-        </a:solidFill>
-        <a:gradFill rotWithShape="1">
-          <a:gsLst>
-            <a:gs pos="0">
-              <a:schemeClr val="phClr">
-                <a:tint val="40000"/>
-                <a:satMod val="350000"/>
-              </a:schemeClr>
-            </a:gs>
-            <a:gs pos="40000">
-              <a:schemeClr val="phClr">
-                <a:tint val="45000"/>
-                <a:shade val="99000"/>
-                <a:satMod val="350000"/>
-              </a:schemeClr>
-            </a:gs>
-            <a:gs pos="100000">
-              <a:schemeClr val="phClr">
-                <a:shade val="20000"/>
-                <a:satMod val="255000"/>
-              </a:schemeClr>
-            </a:gs>
-          </a:gsLst>
-          <a:path path="circle">
-            <a:fillToRect l="50000" t="-80000" r="50000" b="180000"/>
-          </a:path>
-        </a:gradFill>
-        <a:gradFill rotWithShape="1">
-          <a:gsLst>
-            <a:gs pos="0">
-              <a:schemeClr val="phClr">
-                <a:tint val="80000"/>
-                <a:satMod val="300000"/>
-              </a:schemeClr>
-            </a:gs>
-            <a:gs pos="100000">
-              <a:schemeClr val="phClr">
-                <a:shade val="30000"/>
-                <a:satMod val="200000"/>
-              </a:schemeClr>
-            </a:gs>
-          </a:gsLst>
-          <a:path path="circle">
-            <a:fillToRect l="50000" t="50000" r="50000" b="50000"/>
-          </a:path>
-        </a:gradFill>
-      </a:bgFillStyleLst>
-    </a:fmtScheme>
-  </a:themeElements>
+  <a:objectDefaults/>
+  <a:extraClrSchemeLst/>
 </a:theme>
 </file>